--- a/static/ppts/G7_Sci_Types_of_Forces.pptx
+++ b/static/ppts/G7_Sci_Types_of_Forces.pptx
@@ -11,9 +11,11 @@
     <p:sldId id="259" r:id="rId5"/>
     <p:sldId id="260" r:id="rId6"/>
     <p:sldId id="261" r:id="rId7"/>
+    <p:sldId id="262" r:id="rId8"/>
+    <p:sldId id="263" r:id="rId9"/>
   </p:sldIdLst>
   <p:notesMasterIdLst>
-    <p:notesMasterId r:id="rId8"/>
+    <p:notesMasterId r:id="rId10"/>
   </p:notesMasterIdLst>
   <p:sldSz cx="9144000" cy="5143500"/>
   <p:notesSz cx="5143500" cy="9144000"/>
@@ -971,6 +973,182 @@
             <a:fld id="{F7021451-1387-4CA6-816F-3879F97B5CBC}" type="slidenum">
               <a:rPr lang="en-US"/>
               <a:t>6</a:t>
+            </a:fld>
+            <a:endParaRPr lang="en-US"/>
+          </a:p>
+        </p:txBody>
+      </p:sp>
+    </p:spTree>
+    <p:extLst>
+      <p:ext uri="{BB962C8B-B14F-4D97-AF65-F5344CB8AC3E}">
+        <p14:creationId xmlns:p14="http://schemas.microsoft.com/office/powerpoint/2010/main" val="1024086991"/>
+      </p:ext>
+    </p:extLst>
+  </p:cSld>
+  <p:clrMapOvr>
+    <a:masterClrMapping/>
+  </p:clrMapOvr>
+</p:notes>
+</file>
+
+<file path=ppt/notesSlides/notesSlide7.xml><?xml version="1.0" encoding="utf-8"?>
+<p:notes xmlns:a="http://schemas.openxmlformats.org/drawingml/2006/main" xmlns:r="http://schemas.openxmlformats.org/officeDocument/2006/relationships" xmlns:p="http://schemas.openxmlformats.org/presentationml/2006/main">
+  <p:cSld>
+    <p:spTree>
+      <p:nvGrpSpPr>
+        <p:cNvPr id="1" name=""/>
+        <p:cNvGrpSpPr/>
+        <p:nvPr/>
+      </p:nvGrpSpPr>
+      <p:grpSpPr>
+        <a:xfrm>
+          <a:off x="0" y="0"/>
+          <a:ext cx="0" cy="0"/>
+          <a:chOff x="0" y="0"/>
+          <a:chExt cx="0" cy="0"/>
+        </a:xfrm>
+      </p:grpSpPr>
+      <p:sp>
+        <p:nvSpPr>
+          <p:cNvPr id="2" name="Slide Image Placeholder 1"/>
+          <p:cNvSpPr>
+            <a:spLocks noGrp="1" noRot="1" noChangeAspect="1"/>
+          </p:cNvSpPr>
+          <p:nvPr>
+            <p:ph type="sldImg"/>
+          </p:nvPr>
+        </p:nvSpPr>
+        <p:spPr/>
+      </p:sp>
+      <p:sp>
+        <p:nvSpPr>
+          <p:cNvPr id="3" name="Notes Placeholder 2"/>
+          <p:cNvSpPr>
+            <a:spLocks noGrp="1"/>
+          </p:cNvSpPr>
+          <p:nvPr>
+            <p:ph type="body" idx="1"/>
+          </p:nvPr>
+        </p:nvSpPr>
+        <p:spPr/>
+        <p:txBody>
+          <a:bodyPr/>
+          <a:lstStyle/>
+          <a:p>
+            <a:r>
+              <a:rPr lang="en-US" dirty="0"/>
+              <a:t/>
+            </a:r>
+            <a:endParaRPr lang="en-US" dirty="0"/>
+          </a:p>
+        </p:txBody>
+      </p:sp>
+      <p:sp>
+        <p:nvSpPr>
+          <p:cNvPr id="4" name="Slide Number Placeholder 3"/>
+          <p:cNvSpPr>
+            <a:spLocks noGrp="1"/>
+          </p:cNvSpPr>
+          <p:nvPr>
+            <p:ph type="sldNum" sz="quarter" idx="10"/>
+          </p:nvPr>
+        </p:nvSpPr>
+        <p:spPr/>
+        <p:txBody>
+          <a:bodyPr/>
+          <a:lstStyle/>
+          <a:p>
+            <a:fld id="{F7021451-1387-4CA6-816F-3879F97B5CBC}" type="slidenum">
+              <a:rPr lang="en-US"/>
+              <a:t>7</a:t>
+            </a:fld>
+            <a:endParaRPr lang="en-US"/>
+          </a:p>
+        </p:txBody>
+      </p:sp>
+    </p:spTree>
+    <p:extLst>
+      <p:ext uri="{BB962C8B-B14F-4D97-AF65-F5344CB8AC3E}">
+        <p14:creationId xmlns:p14="http://schemas.microsoft.com/office/powerpoint/2010/main" val="1024086991"/>
+      </p:ext>
+    </p:extLst>
+  </p:cSld>
+  <p:clrMapOvr>
+    <a:masterClrMapping/>
+  </p:clrMapOvr>
+</p:notes>
+</file>
+
+<file path=ppt/notesSlides/notesSlide8.xml><?xml version="1.0" encoding="utf-8"?>
+<p:notes xmlns:a="http://schemas.openxmlformats.org/drawingml/2006/main" xmlns:r="http://schemas.openxmlformats.org/officeDocument/2006/relationships" xmlns:p="http://schemas.openxmlformats.org/presentationml/2006/main">
+  <p:cSld>
+    <p:spTree>
+      <p:nvGrpSpPr>
+        <p:cNvPr id="1" name=""/>
+        <p:cNvGrpSpPr/>
+        <p:nvPr/>
+      </p:nvGrpSpPr>
+      <p:grpSpPr>
+        <a:xfrm>
+          <a:off x="0" y="0"/>
+          <a:ext cx="0" cy="0"/>
+          <a:chOff x="0" y="0"/>
+          <a:chExt cx="0" cy="0"/>
+        </a:xfrm>
+      </p:grpSpPr>
+      <p:sp>
+        <p:nvSpPr>
+          <p:cNvPr id="2" name="Slide Image Placeholder 1"/>
+          <p:cNvSpPr>
+            <a:spLocks noGrp="1" noRot="1" noChangeAspect="1"/>
+          </p:cNvSpPr>
+          <p:nvPr>
+            <p:ph type="sldImg"/>
+          </p:nvPr>
+        </p:nvSpPr>
+        <p:spPr/>
+      </p:sp>
+      <p:sp>
+        <p:nvSpPr>
+          <p:cNvPr id="3" name="Notes Placeholder 2"/>
+          <p:cNvSpPr>
+            <a:spLocks noGrp="1"/>
+          </p:cNvSpPr>
+          <p:nvPr>
+            <p:ph type="body" idx="1"/>
+          </p:nvPr>
+        </p:nvSpPr>
+        <p:spPr/>
+        <p:txBody>
+          <a:bodyPr/>
+          <a:lstStyle/>
+          <a:p>
+            <a:r>
+              <a:rPr lang="en-US" dirty="0"/>
+              <a:t/>
+            </a:r>
+            <a:endParaRPr lang="en-US" dirty="0"/>
+          </a:p>
+        </p:txBody>
+      </p:sp>
+      <p:sp>
+        <p:nvSpPr>
+          <p:cNvPr id="4" name="Slide Number Placeholder 3"/>
+          <p:cNvSpPr>
+            <a:spLocks noGrp="1"/>
+          </p:cNvSpPr>
+          <p:nvPr>
+            <p:ph type="sldNum" sz="quarter" idx="10"/>
+          </p:nvPr>
+        </p:nvSpPr>
+        <p:spPr/>
+        <p:txBody>
+          <a:bodyPr/>
+          <a:lstStyle/>
+          <a:p>
+            <a:fld id="{F7021451-1387-4CA6-816F-3879F97B5CBC}" type="slidenum">
+              <a:rPr lang="en-US"/>
+              <a:t>8</a:t>
             </a:fld>
             <a:endParaRPr lang="en-US"/>
           </a:p>
@@ -1456,7 +1634,7 @@
               <a:buNone/>
             </a:pPr>
             <a:r>
-              <a:rPr lang="en-US" sz="1600" dirty="0">
+              <a:rPr lang="en-US" sz="1600" i="1" dirty="0">
                 <a:solidFill>
                   <a:srgbClr val="9B9690"/>
                 </a:solidFill>
@@ -1464,7 +1642,7 @@
                 <a:ea typeface="Calibri" pitchFamily="34" charset="-122"/>
                 <a:cs typeface="Calibri" pitchFamily="34" charset="-120"/>
               </a:rPr>
-              <a:t>Pushes, pulls, and how we measure them</a:t>
+              <a:t>Pushes, pulls, and everything in between</a:t>
             </a:r>
             <a:endParaRPr lang="en-US" sz="1600" dirty="0"/>
           </a:p>
@@ -1495,7 +1673,7 @@
               <a:buNone/>
             </a:pPr>
             <a:r>
-              <a:rPr lang="en-US" sz="1100" dirty="0">
+              <a:rPr lang="en-US" sz="1200" dirty="0">
                 <a:solidFill>
                   <a:srgbClr val="6B6660"/>
                 </a:solidFill>
@@ -1503,9 +1681,9 @@
                 <a:ea typeface="Calibri" pitchFamily="34" charset="-122"/>
                 <a:cs typeface="Calibri" pitchFamily="34" charset="-120"/>
               </a:rPr>
-              <a:t>Mr Zocchi · NIS</a:t>
-            </a:r>
-            <a:endParaRPr lang="en-US" sz="1100" dirty="0"/>
+              <a:t>Mr Zocchi</a:t>
+            </a:r>
+            <a:endParaRPr lang="en-US" sz="1200" dirty="0"/>
           </a:p>
         </p:txBody>
       </p:sp>
@@ -1549,41 +1727,21 @@
             <a:avLst/>
           </a:prstGeom>
           <a:solidFill>
-            <a:srgbClr val="FAF8F5"/>
+            <a:srgbClr val="111D35"/>
           </a:solidFill>
           <a:ln/>
         </p:spPr>
       </p:sp>
       <p:sp>
         <p:nvSpPr>
-          <p:cNvPr id="3" name="Shape 1"/>
-          <p:cNvSpPr/>
-          <p:nvPr/>
-        </p:nvSpPr>
-        <p:spPr>
-          <a:xfrm>
-            <a:off x="0" y="0"/>
-            <a:ext cx="9144000" cy="54864"/>
-          </a:xfrm>
-          <a:prstGeom prst="rect">
-            <a:avLst/>
-          </a:prstGeom>
-          <a:solidFill>
-            <a:srgbClr val="C8372D"/>
-          </a:solidFill>
-          <a:ln/>
-        </p:spPr>
-      </p:sp>
-      <p:sp>
-        <p:nvSpPr>
-          <p:cNvPr id="4" name="Text 2"/>
-          <p:cNvSpPr/>
-          <p:nvPr/>
-        </p:nvSpPr>
-        <p:spPr>
-          <a:xfrm>
-            <a:off x="640080" y="320040"/>
-            <a:ext cx="7863840" cy="640080"/>
+          <p:cNvPr id="3" name="Text 1"/>
+          <p:cNvSpPr/>
+          <p:nvPr/>
+        </p:nvSpPr>
+        <p:spPr>
+          <a:xfrm>
+            <a:off x="6858000" y="182880"/>
+            <a:ext cx="2286000" cy="2743200"/>
           </a:xfrm>
           <a:prstGeom prst="rect">
             <a:avLst/>
@@ -1592,37 +1750,39 @@
           <a:ln/>
         </p:spPr>
         <p:txBody>
-          <a:bodyPr wrap="square" lIns="0" tIns="0" rIns="0" bIns="0" rtlCol="0" anchor="ctr"/>
-          <a:lstStyle/>
-          <a:p>
-            <a:pPr indent="0" marL="0">
+          <a:bodyPr wrap="square" rtlCol="0" anchor="ctr"/>
+          <a:lstStyle/>
+          <a:p>
+            <a:pPr algn="ctr" indent="0" marL="0">
               <a:buNone/>
             </a:pPr>
             <a:r>
-              <a:rPr lang="en-US" sz="2600" b="1" dirty="0">
+              <a:rPr lang="en-US" sz="16000" b="1" dirty="0">
                 <a:solidFill>
-                  <a:srgbClr val="1B2A4A"/>
+                  <a:srgbClr val="C8372D">
+                    <a:alpha val="80000"/>
+                  </a:srgbClr>
                 </a:solidFill>
                 <a:latin typeface="Georgia" pitchFamily="34" charset="0"/>
                 <a:ea typeface="Georgia" pitchFamily="34" charset="-122"/>
                 <a:cs typeface="Georgia" pitchFamily="34" charset="-120"/>
               </a:rPr>
-              <a:t>What Is a Force?</a:t>
-            </a:r>
-            <a:endParaRPr lang="en-US" sz="2600" dirty="0"/>
-          </a:p>
-        </p:txBody>
-      </p:sp>
-      <p:sp>
-        <p:nvSpPr>
-          <p:cNvPr id="5" name="Text 3"/>
-          <p:cNvSpPr/>
-          <p:nvPr/>
-        </p:nvSpPr>
-        <p:spPr>
-          <a:xfrm>
-            <a:off x="640080" y="1188720"/>
-            <a:ext cx="7863840" cy="3200400"/>
+              <a:t>?</a:t>
+            </a:r>
+            <a:endParaRPr lang="en-US" sz="16000" dirty="0"/>
+          </a:p>
+        </p:txBody>
+      </p:sp>
+      <p:sp>
+        <p:nvSpPr>
+          <p:cNvPr id="4" name="Text 2"/>
+          <p:cNvSpPr/>
+          <p:nvPr/>
+        </p:nvSpPr>
+        <p:spPr>
+          <a:xfrm>
+            <a:off x="731520" y="548640"/>
+            <a:ext cx="2743200" cy="365760"/>
           </a:xfrm>
           <a:prstGeom prst="rect">
             <a:avLst/>
@@ -1631,91 +1791,246 @@
           <a:ln/>
         </p:spPr>
         <p:txBody>
-          <a:bodyPr wrap="square" rtlCol="0" anchor="t"/>
-          <a:lstStyle/>
-          <a:p>
-            <a:pPr marL="342900" indent="-342900">
-              <a:lnSpc>
-                <a:spcPct val="140000"/>
-              </a:lnSpc>
-              <a:buSzPct val="100000"/>
-              <a:buChar char="•"/>
+          <a:bodyPr wrap="square" rtlCol="0" anchor="ctr"/>
+          <a:lstStyle/>
+          <a:p>
+            <a:pPr indent="0" marL="0">
+              <a:buNone/>
             </a:pPr>
             <a:r>
-              <a:rPr lang="en-US" sz="1500" dirty="0">
+              <a:rPr lang="en-US" sz="1200" b="1" spc="400" kern="0" dirty="0">
                 <a:solidFill>
-                  <a:srgbClr val="3D3A36"/>
+                  <a:srgbClr val="C8372D"/>
                 </a:solidFill>
                 <a:latin typeface="Calibri" pitchFamily="34" charset="0"/>
                 <a:ea typeface="Calibri" pitchFamily="34" charset="-122"/>
                 <a:cs typeface="Calibri" pitchFamily="34" charset="-120"/>
               </a:rPr>
-              <a:t>A force is a push or pull that acts on an object.</a:t>
-            </a:r>
-            <a:endParaRPr lang="en-US" sz="1500" dirty="0"/>
-          </a:p>
-          <a:p>
-            <a:pPr marL="342900" indent="-342900">
-              <a:lnSpc>
-                <a:spcPct val="140000"/>
-              </a:lnSpc>
-              <a:buSzPct val="100000"/>
-              <a:buChar char="•"/>
+              <a:t>INQUIRY</a:t>
+            </a:r>
+            <a:endParaRPr lang="en-US" sz="1200" dirty="0"/>
+          </a:p>
+        </p:txBody>
+      </p:sp>
+      <p:sp>
+        <p:nvSpPr>
+          <p:cNvPr id="5" name="Text 3"/>
+          <p:cNvSpPr/>
+          <p:nvPr/>
+        </p:nvSpPr>
+        <p:spPr>
+          <a:xfrm>
+            <a:off x="731520" y="1005840"/>
+            <a:ext cx="6858000" cy="1463040"/>
+          </a:xfrm>
+          <a:prstGeom prst="rect">
+            <a:avLst/>
+          </a:prstGeom>
+          <a:noFill/>
+          <a:ln/>
+        </p:spPr>
+        <p:txBody>
+          <a:bodyPr wrap="square" rtlCol="0" anchor="t"/>
+          <a:lstStyle/>
+          <a:p>
+            <a:pPr indent="0" marL="0">
+              <a:buNone/>
             </a:pPr>
             <a:r>
-              <a:rPr lang="en-US" sz="1500" dirty="0">
+              <a:rPr lang="en-US" sz="2800" b="1" dirty="0">
                 <a:solidFill>
-                  <a:srgbClr val="3D3A36"/>
+                  <a:srgbClr val="FFFFFF"/>
+                </a:solidFill>
+                <a:latin typeface="Georgia" pitchFamily="34" charset="0"/>
+                <a:ea typeface="Georgia" pitchFamily="34" charset="-122"/>
+                <a:cs typeface="Georgia" pitchFamily="34" charset="-120"/>
+              </a:rPr>
+              <a:t>Why can a maglev train (磁悬浮) in Shanghai travel at 430 km/h with almost no friction?</a:t>
+            </a:r>
+            <a:endParaRPr lang="en-US" sz="2800" dirty="0"/>
+          </a:p>
+        </p:txBody>
+      </p:sp>
+      <p:sp>
+        <p:nvSpPr>
+          <p:cNvPr id="6" name="Text 4"/>
+          <p:cNvSpPr/>
+          <p:nvPr/>
+        </p:nvSpPr>
+        <p:spPr>
+          <a:xfrm>
+            <a:off x="731520" y="2560320"/>
+            <a:ext cx="6858000" cy="548640"/>
+          </a:xfrm>
+          <a:prstGeom prst="rect">
+            <a:avLst/>
+          </a:prstGeom>
+          <a:noFill/>
+          <a:ln/>
+        </p:spPr>
+        <p:txBody>
+          <a:bodyPr wrap="square" rtlCol="0" anchor="ctr"/>
+          <a:lstStyle/>
+          <a:p>
+            <a:pPr indent="0" marL="0">
+              <a:buNone/>
+            </a:pPr>
+            <a:r>
+              <a:rPr lang="en-US" sz="1400" i="1" dirty="0">
+                <a:solidFill>
+                  <a:srgbClr val="9B9690"/>
                 </a:solidFill>
                 <a:latin typeface="Calibri" pitchFamily="34" charset="0"/>
                 <a:ea typeface="Calibri" pitchFamily="34" charset="-122"/>
                 <a:cs typeface="Calibri" pitchFamily="34" charset="-120"/>
               </a:rPr>
-              <a:t>Forces can change an object's speed, direction, or shape.</a:t>
-            </a:r>
-            <a:endParaRPr lang="en-US" sz="1500" dirty="0"/>
-          </a:p>
-          <a:p>
-            <a:pPr marL="342900" indent="-342900">
-              <a:lnSpc>
-                <a:spcPct val="140000"/>
-              </a:lnSpc>
-              <a:buSzPct val="100000"/>
-              <a:buChar char="•"/>
+              <a:t>The train floats above the track using magnetic force — a non-contact force.</a:t>
+            </a:r>
+            <a:endParaRPr lang="en-US" sz="1400" dirty="0"/>
+          </a:p>
+        </p:txBody>
+      </p:sp>
+      <p:sp>
+        <p:nvSpPr>
+          <p:cNvPr id="7" name="Shape 5"/>
+          <p:cNvSpPr/>
+          <p:nvPr/>
+        </p:nvSpPr>
+        <p:spPr>
+          <a:xfrm>
+            <a:off x="548640" y="3200400"/>
+            <a:ext cx="7315200" cy="1645920"/>
+          </a:xfrm>
+          <a:prstGeom prst="rect">
+            <a:avLst/>
+          </a:prstGeom>
+          <a:solidFill>
+            <a:srgbClr val="243660"/>
+          </a:solidFill>
+          <a:ln/>
+        </p:spPr>
+      </p:sp>
+      <p:sp>
+        <p:nvSpPr>
+          <p:cNvPr id="8" name="Text 6"/>
+          <p:cNvSpPr/>
+          <p:nvPr/>
+        </p:nvSpPr>
+        <p:spPr>
+          <a:xfrm>
+            <a:off x="731520" y="3246120"/>
+            <a:ext cx="3657600" cy="320040"/>
+          </a:xfrm>
+          <a:prstGeom prst="rect">
+            <a:avLst/>
+          </a:prstGeom>
+          <a:noFill/>
+          <a:ln/>
+        </p:spPr>
+        <p:txBody>
+          <a:bodyPr wrap="square" rtlCol="0" anchor="ctr"/>
+          <a:lstStyle/>
+          <a:p>
+            <a:pPr indent="0" marL="0">
+              <a:buNone/>
             </a:pPr>
             <a:r>
-              <a:rPr lang="en-US" sz="1500" dirty="0">
+              <a:rPr lang="en-US" sz="1100" b="1" spc="200" kern="0" dirty="0">
                 <a:solidFill>
-                  <a:srgbClr val="3D3A36"/>
+                  <a:srgbClr val="C8372D"/>
                 </a:solidFill>
                 <a:latin typeface="Calibri" pitchFamily="34" charset="0"/>
                 <a:ea typeface="Calibri" pitchFamily="34" charset="-122"/>
                 <a:cs typeface="Calibri" pitchFamily="34" charset="-120"/>
               </a:rPr>
-              <a:t>Forces are measured in Newtons (N).</a:t>
-            </a:r>
-            <a:endParaRPr lang="en-US" sz="1500" dirty="0"/>
-          </a:p>
+              <a:t>Think — Pair — Share</a:t>
+            </a:r>
+            <a:endParaRPr lang="en-US" sz="1100" dirty="0"/>
+          </a:p>
+        </p:txBody>
+      </p:sp>
+      <p:sp>
+        <p:nvSpPr>
+          <p:cNvPr id="9" name="Text 7"/>
+          <p:cNvSpPr/>
+          <p:nvPr/>
+        </p:nvSpPr>
+        <p:spPr>
+          <a:xfrm>
+            <a:off x="731520" y="3566160"/>
+            <a:ext cx="6949440" cy="1188720"/>
+          </a:xfrm>
+          <a:prstGeom prst="rect">
+            <a:avLst/>
+          </a:prstGeom>
+          <a:noFill/>
+          <a:ln/>
+        </p:spPr>
+        <p:txBody>
+          <a:bodyPr wrap="square" rtlCol="0" anchor="ctr"/>
+          <a:lstStyle/>
           <a:p>
             <a:pPr marL="342900" indent="-342900">
-              <a:lnSpc>
-                <a:spcPct val="140000"/>
-              </a:lnSpc>
+              <a:spcAft>
+                <a:spcPts val="600"/>
+              </a:spcAft>
               <a:buSzPct val="100000"/>
               <a:buChar char="•"/>
             </a:pPr>
             <a:r>
-              <a:rPr lang="en-US" sz="1500" dirty="0">
+              <a:rPr lang="en-US" sz="1400" dirty="0">
                 <a:solidFill>
-                  <a:srgbClr val="3D3A36"/>
+                  <a:srgbClr val="E5E2DC"/>
                 </a:solidFill>
                 <a:latin typeface="Calibri" pitchFamily="34" charset="0"/>
                 <a:ea typeface="Calibri" pitchFamily="34" charset="-122"/>
                 <a:cs typeface="Calibri" pitchFamily="34" charset="-120"/>
               </a:rPr>
-              <a:t>Forces have both size (magnitude) and direction.</a:t>
-            </a:r>
-            <a:endParaRPr lang="en-US" sz="1500" dirty="0"/>
+              <a:t>What forces act on you right now sitting in your chair?</a:t>
+            </a:r>
+            <a:endParaRPr lang="en-US" sz="1400" dirty="0"/>
+          </a:p>
+          <a:p>
+            <a:pPr marL="342900" indent="-342900">
+              <a:spcAft>
+                <a:spcPts val="600"/>
+              </a:spcAft>
+              <a:buSzPct val="100000"/>
+              <a:buChar char="•"/>
+            </a:pPr>
+            <a:r>
+              <a:rPr lang="en-US" sz="1400" dirty="0">
+                <a:solidFill>
+                  <a:srgbClr val="E5E2DC"/>
+                </a:solidFill>
+                <a:latin typeface="Calibri" pitchFamily="34" charset="0"/>
+                <a:ea typeface="Calibri" pitchFamily="34" charset="-122"/>
+                <a:cs typeface="Calibri" pitchFamily="34" charset="-120"/>
+              </a:rPr>
+              <a:t>What's the difference between a push and a pull?</a:t>
+            </a:r>
+            <a:endParaRPr lang="en-US" sz="1400" dirty="0"/>
+          </a:p>
+          <a:p>
+            <a:pPr marL="342900" indent="-342900">
+              <a:spcAft>
+                <a:spcPts val="600"/>
+              </a:spcAft>
+              <a:buSzPct val="100000"/>
+              <a:buChar char="•"/>
+            </a:pPr>
+            <a:r>
+              <a:rPr lang="en-US" sz="1400" dirty="0">
+                <a:solidFill>
+                  <a:srgbClr val="E5E2DC"/>
+                </a:solidFill>
+                <a:latin typeface="Calibri" pitchFamily="34" charset="0"/>
+                <a:ea typeface="Calibri" pitchFamily="34" charset="-122"/>
+                <a:cs typeface="Calibri" pitchFamily="34" charset="-120"/>
+              </a:rPr>
+              <a:t>Can a force act on something without touching it?</a:t>
+            </a:r>
+            <a:endParaRPr lang="en-US" sz="1400" dirty="0"/>
           </a:p>
         </p:txBody>
       </p:sp>
@@ -1730,6 +2045,13 @@
 <file path=ppt/slides/slide3.xml><?xml version="1.0" encoding="utf-8"?>
 <p:sld xmlns:a="http://schemas.openxmlformats.org/drawingml/2006/main" xmlns:r="http://schemas.openxmlformats.org/officeDocument/2006/relationships" xmlns:p="http://schemas.openxmlformats.org/presentationml/2006/main">
   <p:cSld name="Slide 3">
+    <p:bg>
+      <p:bgPr>
+        <a:solidFill>
+          <a:srgbClr val="FAF8F5"/>
+        </a:solidFill>
+      </p:bgPr>
+    </p:bg>
     <p:spTree>
       <p:nvGrpSpPr>
         <p:cNvPr id="1" name=""/>
@@ -1753,13 +2075,13 @@
         <p:spPr>
           <a:xfrm>
             <a:off x="0" y="0"/>
-            <a:ext cx="9144000" cy="5143500"/>
+            <a:ext cx="9144000" cy="822960"/>
           </a:xfrm>
           <a:prstGeom prst="rect">
             <a:avLst/>
           </a:prstGeom>
           <a:solidFill>
-            <a:srgbClr val="FAF8F5"/>
+            <a:srgbClr val="FFFFFF"/>
           </a:solidFill>
           <a:ln/>
         </p:spPr>
@@ -1772,8 +2094,8 @@
         </p:nvSpPr>
         <p:spPr>
           <a:xfrm>
-            <a:off x="0" y="0"/>
-            <a:ext cx="9144000" cy="54864"/>
+            <a:off x="0" y="795528"/>
+            <a:ext cx="9144000" cy="27432"/>
           </a:xfrm>
           <a:prstGeom prst="rect">
             <a:avLst/>
@@ -1792,8 +2114,8 @@
         </p:nvSpPr>
         <p:spPr>
           <a:xfrm>
-            <a:off x="640080" y="320040"/>
-            <a:ext cx="7863840" cy="548640"/>
+            <a:off x="640080" y="91440"/>
+            <a:ext cx="7863840" cy="640080"/>
           </a:xfrm>
           <a:prstGeom prst="rect">
             <a:avLst/>
@@ -1809,7 +2131,7 @@
               <a:buNone/>
             </a:pPr>
             <a:r>
-              <a:rPr lang="en-US" sz="2600" b="1" dirty="0">
+              <a:rPr lang="en-US" sz="2200" b="1" dirty="0">
                 <a:solidFill>
                   <a:srgbClr val="1B2A4A"/>
                 </a:solidFill>
@@ -1817,51 +2139,22 @@
                 <a:ea typeface="Georgia" pitchFamily="34" charset="-122"/>
                 <a:cs typeface="Georgia" pitchFamily="34" charset="-120"/>
               </a:rPr>
-              <a:t>Contact vs Non-Contact Forces</a:t>
-            </a:r>
-            <a:endParaRPr lang="en-US" sz="2600" dirty="0"/>
-          </a:p>
-        </p:txBody>
-      </p:sp>
-      <p:sp>
-        <p:nvSpPr>
-          <p:cNvPr id="5" name="Shape 3"/>
-          <p:cNvSpPr/>
-          <p:nvPr/>
-        </p:nvSpPr>
-        <p:spPr>
-          <a:xfrm>
-            <a:off x="640080" y="1097280"/>
-            <a:ext cx="3749040" cy="3474720"/>
-          </a:xfrm>
-          <a:prstGeom prst="roundRect">
-            <a:avLst>
-              <a:gd name="adj" fmla="val 2632"/>
-            </a:avLst>
-          </a:prstGeom>
-          <a:solidFill>
-            <a:srgbClr val="FFFFFF"/>
-          </a:solidFill>
-          <a:ln/>
-          <a:effectLst>
-            <a:outerShdw sx="100000" sy="100000" kx="0" ky="0" algn="bl" rotWithShape="0" blurRad="76200" dist="25400" dir="8100000">
-              <a:srgbClr val="000000">
-                <a:alpha val="8000"/>
-              </a:srgbClr>
-            </a:outerShdw>
-          </a:effectLst>
-        </p:spPr>
-      </p:sp>
-      <p:sp>
-        <p:nvSpPr>
-          <p:cNvPr id="6" name="Text 4"/>
-          <p:cNvSpPr/>
-          <p:nvPr/>
-        </p:nvSpPr>
-        <p:spPr>
-          <a:xfrm>
-            <a:off x="822960" y="1234440"/>
-            <a:ext cx="3383280" cy="365760"/>
+              <a:t>What Is a Force?</a:t>
+            </a:r>
+            <a:endParaRPr lang="en-US" sz="2200" dirty="0"/>
+          </a:p>
+        </p:txBody>
+      </p:sp>
+      <p:sp>
+        <p:nvSpPr>
+          <p:cNvPr id="5" name="Text 3"/>
+          <p:cNvSpPr/>
+          <p:nvPr/>
+        </p:nvSpPr>
+        <p:spPr>
+          <a:xfrm>
+            <a:off x="640080" y="1005840"/>
+            <a:ext cx="7863840" cy="2926080"/>
           </a:xfrm>
           <a:prstGeom prst="rect">
             <a:avLst/>
@@ -1873,54 +2166,15 @@
           <a:bodyPr wrap="square" rtlCol="0" anchor="ctr"/>
           <a:lstStyle/>
           <a:p>
-            <a:pPr indent="0" marL="0">
-              <a:buNone/>
-            </a:pPr>
-            <a:r>
-              <a:rPr lang="en-US" sz="1600" b="1" dirty="0">
-                <a:solidFill>
-                  <a:srgbClr val="C8372D"/>
-                </a:solidFill>
-                <a:latin typeface="Georgia" pitchFamily="34" charset="0"/>
-                <a:ea typeface="Georgia" pitchFamily="34" charset="-122"/>
-                <a:cs typeface="Georgia" pitchFamily="34" charset="-120"/>
-              </a:rPr>
-              <a:t>Contact Forces</a:t>
-            </a:r>
-            <a:endParaRPr lang="en-US" sz="1600" dirty="0"/>
-          </a:p>
-        </p:txBody>
-      </p:sp>
-      <p:sp>
-        <p:nvSpPr>
-          <p:cNvPr id="7" name="Text 5"/>
-          <p:cNvSpPr/>
-          <p:nvPr/>
-        </p:nvSpPr>
-        <p:spPr>
-          <a:xfrm>
-            <a:off x="822960" y="1691640"/>
-            <a:ext cx="3383280" cy="2743200"/>
-          </a:xfrm>
-          <a:prstGeom prst="rect">
-            <a:avLst/>
-          </a:prstGeom>
-          <a:noFill/>
-          <a:ln/>
-        </p:spPr>
-        <p:txBody>
-          <a:bodyPr wrap="square" rtlCol="0" anchor="t"/>
-          <a:lstStyle/>
-          <a:p>
             <a:pPr marL="342900" indent="-342900">
-              <a:lnSpc>
-                <a:spcPct val="135000"/>
-              </a:lnSpc>
+              <a:spcAft>
+                <a:spcPts val="800"/>
+              </a:spcAft>
               <a:buSzPct val="100000"/>
               <a:buChar char="•"/>
             </a:pPr>
             <a:r>
-              <a:rPr lang="en-US" sz="1300" dirty="0">
+              <a:rPr lang="en-US" sz="1600" dirty="0">
                 <a:solidFill>
                   <a:srgbClr val="3D3A36"/>
                 </a:solidFill>
@@ -1928,20 +2182,20 @@
                 <a:ea typeface="Calibri" pitchFamily="34" charset="-122"/>
                 <a:cs typeface="Calibri" pitchFamily="34" charset="-120"/>
               </a:rPr>
-              <a:t>Require physical contact</a:t>
-            </a:r>
-            <a:endParaRPr lang="en-US" sz="1300" dirty="0"/>
+              <a:t>A force is a push or a pull on an object.</a:t>
+            </a:r>
+            <a:endParaRPr lang="en-US" sz="1600" dirty="0"/>
           </a:p>
           <a:p>
             <a:pPr marL="342900" indent="-342900">
-              <a:lnSpc>
-                <a:spcPct val="135000"/>
-              </a:lnSpc>
+              <a:spcAft>
+                <a:spcPts val="800"/>
+              </a:spcAft>
               <a:buSzPct val="100000"/>
               <a:buChar char="•"/>
             </a:pPr>
             <a:r>
-              <a:rPr lang="en-US" sz="1300" dirty="0">
+              <a:rPr lang="en-US" sz="1600" dirty="0">
                 <a:solidFill>
                   <a:srgbClr val="3D3A36"/>
                 </a:solidFill>
@@ -1949,20 +2203,20 @@
                 <a:ea typeface="Calibri" pitchFamily="34" charset="-122"/>
                 <a:cs typeface="Calibri" pitchFamily="34" charset="-120"/>
               </a:rPr>
-              <a:t>Friction</a:t>
-            </a:r>
-            <a:endParaRPr lang="en-US" sz="1300" dirty="0"/>
+              <a:t>Forces can change speed, direction, or shape.</a:t>
+            </a:r>
+            <a:endParaRPr lang="en-US" sz="1600" dirty="0"/>
           </a:p>
           <a:p>
             <a:pPr marL="342900" indent="-342900">
-              <a:lnSpc>
-                <a:spcPct val="135000"/>
-              </a:lnSpc>
+              <a:spcAft>
+                <a:spcPts val="800"/>
+              </a:spcAft>
               <a:buSzPct val="100000"/>
               <a:buChar char="•"/>
             </a:pPr>
             <a:r>
-              <a:rPr lang="en-US" sz="1300" dirty="0">
+              <a:rPr lang="en-US" sz="1600" dirty="0">
                 <a:solidFill>
                   <a:srgbClr val="3D3A36"/>
                 </a:solidFill>
@@ -1970,20 +2224,20 @@
                 <a:ea typeface="Calibri" pitchFamily="34" charset="-122"/>
                 <a:cs typeface="Calibri" pitchFamily="34" charset="-120"/>
               </a:rPr>
-              <a:t>Air resistance</a:t>
-            </a:r>
-            <a:endParaRPr lang="en-US" sz="1300" dirty="0"/>
+              <a:t>Measured in Newtons (N).</a:t>
+            </a:r>
+            <a:endParaRPr lang="en-US" sz="1600" dirty="0"/>
           </a:p>
           <a:p>
             <a:pPr marL="342900" indent="-342900">
-              <a:lnSpc>
-                <a:spcPct val="135000"/>
-              </a:lnSpc>
+              <a:spcAft>
+                <a:spcPts val="800"/>
+              </a:spcAft>
               <a:buSzPct val="100000"/>
               <a:buChar char="•"/>
             </a:pPr>
             <a:r>
-              <a:rPr lang="en-US" sz="1300" dirty="0">
+              <a:rPr lang="en-US" sz="1600" dirty="0">
                 <a:solidFill>
                   <a:srgbClr val="3D3A36"/>
                 </a:solidFill>
@@ -1991,20 +2245,85 @@
                 <a:ea typeface="Calibri" pitchFamily="34" charset="-122"/>
                 <a:cs typeface="Calibri" pitchFamily="34" charset="-120"/>
               </a:rPr>
-              <a:t>Tension</a:t>
-            </a:r>
-            <a:endParaRPr lang="en-US" sz="1300" dirty="0"/>
-          </a:p>
-          <a:p>
-            <a:pPr marL="342900" indent="-342900">
-              <a:lnSpc>
-                <a:spcPct val="135000"/>
-              </a:lnSpc>
-              <a:buSzPct val="100000"/>
-              <a:buChar char="•"/>
+              <a:t>Forces have SIZE and DIRECTION — they are vectors.</a:t>
+            </a:r>
+            <a:endParaRPr lang="en-US" sz="1600" dirty="0"/>
+          </a:p>
+        </p:txBody>
+      </p:sp>
+      <p:sp>
+        <p:nvSpPr>
+          <p:cNvPr id="6" name="Shape 4"/>
+          <p:cNvSpPr/>
+          <p:nvPr/>
+        </p:nvSpPr>
+        <p:spPr>
+          <a:xfrm>
+            <a:off x="640080" y="4114800"/>
+            <a:ext cx="7863840" cy="731520"/>
+          </a:xfrm>
+          <a:prstGeom prst="rect">
+            <a:avLst/>
+          </a:prstGeom>
+          <a:solidFill>
+            <a:srgbClr val="E8F5F3"/>
+          </a:solidFill>
+          <a:ln/>
+          <a:effectLst>
+            <a:outerShdw sx="100000" sy="100000" kx="0" ky="0" algn="bl" rotWithShape="0" blurRad="76200" dist="25400" dir="8100000">
+              <a:srgbClr val="000000">
+                <a:alpha val="12000"/>
+              </a:srgbClr>
+            </a:outerShdw>
+          </a:effectLst>
+        </p:spPr>
+      </p:sp>
+      <p:sp>
+        <p:nvSpPr>
+          <p:cNvPr id="7" name="Shape 5"/>
+          <p:cNvSpPr/>
+          <p:nvPr/>
+        </p:nvSpPr>
+        <p:spPr>
+          <a:xfrm>
+            <a:off x="640080" y="4114800"/>
+            <a:ext cx="64008" cy="731520"/>
+          </a:xfrm>
+          <a:prstGeom prst="rect">
+            <a:avLst/>
+          </a:prstGeom>
+          <a:solidFill>
+            <a:srgbClr val="C8372D"/>
+          </a:solidFill>
+          <a:ln/>
+        </p:spPr>
+      </p:sp>
+      <p:sp>
+        <p:nvSpPr>
+          <p:cNvPr id="8" name="Text 6"/>
+          <p:cNvSpPr/>
+          <p:nvPr/>
+        </p:nvSpPr>
+        <p:spPr>
+          <a:xfrm>
+            <a:off x="914400" y="4160520"/>
+            <a:ext cx="7406640" cy="640080"/>
+          </a:xfrm>
+          <a:prstGeom prst="rect">
+            <a:avLst/>
+          </a:prstGeom>
+          <a:noFill/>
+          <a:ln/>
+        </p:spPr>
+        <p:txBody>
+          <a:bodyPr wrap="square" rtlCol="0" anchor="ctr"/>
+          <a:lstStyle/>
+          <a:p>
+            <a:pPr indent="0" marL="0">
+              <a:buNone/>
             </a:pPr>
             <a:r>
-              <a:rPr lang="en-US" sz="1300" dirty="0">
+              <a:rPr lang="en-US" sz="1300" i="1" dirty="0">
                 <a:solidFill>
                   <a:srgbClr val="3D3A36"/>
                 </a:solidFill>
@@ -2012,202 +2331,7 @@
                 <a:ea typeface="Calibri" pitchFamily="34" charset="-122"/>
                 <a:cs typeface="Calibri" pitchFamily="34" charset="-120"/>
               </a:rPr>
-              <a:t>Normal (support) force</a:t>
-            </a:r>
-            <a:endParaRPr lang="en-US" sz="1300" dirty="0"/>
-          </a:p>
-        </p:txBody>
-      </p:sp>
-      <p:sp>
-        <p:nvSpPr>
-          <p:cNvPr id="8" name="Shape 6"/>
-          <p:cNvSpPr/>
-          <p:nvPr/>
-        </p:nvSpPr>
-        <p:spPr>
-          <a:xfrm>
-            <a:off x="4754880" y="1097280"/>
-            <a:ext cx="3749040" cy="3474720"/>
-          </a:xfrm>
-          <a:prstGeom prst="roundRect">
-            <a:avLst>
-              <a:gd name="adj" fmla="val 2632"/>
-            </a:avLst>
-          </a:prstGeom>
-          <a:solidFill>
-            <a:srgbClr val="FFFFFF"/>
-          </a:solidFill>
-          <a:ln/>
-          <a:effectLst>
-            <a:outerShdw sx="100000" sy="100000" kx="0" ky="0" algn="bl" rotWithShape="0" blurRad="76200" dist="25400" dir="8100000">
-              <a:srgbClr val="000000">
-                <a:alpha val="8000"/>
-              </a:srgbClr>
-            </a:outerShdw>
-          </a:effectLst>
-        </p:spPr>
-      </p:sp>
-      <p:sp>
-        <p:nvSpPr>
-          <p:cNvPr id="9" name="Text 7"/>
-          <p:cNvSpPr/>
-          <p:nvPr/>
-        </p:nvSpPr>
-        <p:spPr>
-          <a:xfrm>
-            <a:off x="4937760" y="1234440"/>
-            <a:ext cx="3383280" cy="365760"/>
-          </a:xfrm>
-          <a:prstGeom prst="rect">
-            <a:avLst/>
-          </a:prstGeom>
-          <a:noFill/>
-          <a:ln/>
-        </p:spPr>
-        <p:txBody>
-          <a:bodyPr wrap="square" rtlCol="0" anchor="ctr"/>
-          <a:lstStyle/>
-          <a:p>
-            <a:pPr indent="0" marL="0">
-              <a:buNone/>
-            </a:pPr>
-            <a:r>
-              <a:rPr lang="en-US" sz="1600" b="1" dirty="0">
-                <a:solidFill>
-                  <a:srgbClr val="C8372D"/>
-                </a:solidFill>
-                <a:latin typeface="Georgia" pitchFamily="34" charset="0"/>
-                <a:ea typeface="Georgia" pitchFamily="34" charset="-122"/>
-                <a:cs typeface="Georgia" pitchFamily="34" charset="-120"/>
-              </a:rPr>
-              <a:t>Non-Contact Forces</a:t>
-            </a:r>
-            <a:endParaRPr lang="en-US" sz="1600" dirty="0"/>
-          </a:p>
-        </p:txBody>
-      </p:sp>
-      <p:sp>
-        <p:nvSpPr>
-          <p:cNvPr id="10" name="Text 8"/>
-          <p:cNvSpPr/>
-          <p:nvPr/>
-        </p:nvSpPr>
-        <p:spPr>
-          <a:xfrm>
-            <a:off x="4937760" y="1691640"/>
-            <a:ext cx="3383280" cy="2743200"/>
-          </a:xfrm>
-          <a:prstGeom prst="rect">
-            <a:avLst/>
-          </a:prstGeom>
-          <a:noFill/>
-          <a:ln/>
-        </p:spPr>
-        <p:txBody>
-          <a:bodyPr wrap="square" rtlCol="0" anchor="t"/>
-          <a:lstStyle/>
-          <a:p>
-            <a:pPr marL="342900" indent="-342900">
-              <a:lnSpc>
-                <a:spcPct val="135000"/>
-              </a:lnSpc>
-              <a:buSzPct val="100000"/>
-              <a:buChar char="•"/>
-            </a:pPr>
-            <a:r>
-              <a:rPr lang="en-US" sz="1300" dirty="0">
-                <a:solidFill>
-                  <a:srgbClr val="3D3A36"/>
-                </a:solidFill>
-                <a:latin typeface="Calibri" pitchFamily="34" charset="0"/>
-                <a:ea typeface="Calibri" pitchFamily="34" charset="-122"/>
-                <a:cs typeface="Calibri" pitchFamily="34" charset="-120"/>
-              </a:rPr>
-              <a:t>Act at a distance</a:t>
-            </a:r>
-            <a:endParaRPr lang="en-US" sz="1300" dirty="0"/>
-          </a:p>
-          <a:p>
-            <a:pPr marL="342900" indent="-342900">
-              <a:lnSpc>
-                <a:spcPct val="135000"/>
-              </a:lnSpc>
-              <a:buSzPct val="100000"/>
-              <a:buChar char="•"/>
-            </a:pPr>
-            <a:r>
-              <a:rPr lang="en-US" sz="1300" dirty="0">
-                <a:solidFill>
-                  <a:srgbClr val="3D3A36"/>
-                </a:solidFill>
-                <a:latin typeface="Calibri" pitchFamily="34" charset="0"/>
-                <a:ea typeface="Calibri" pitchFamily="34" charset="-122"/>
-                <a:cs typeface="Calibri" pitchFamily="34" charset="-120"/>
-              </a:rPr>
-              <a:t>Gravity</a:t>
-            </a:r>
-            <a:endParaRPr lang="en-US" sz="1300" dirty="0"/>
-          </a:p>
-          <a:p>
-            <a:pPr marL="342900" indent="-342900">
-              <a:lnSpc>
-                <a:spcPct val="135000"/>
-              </a:lnSpc>
-              <a:buSzPct val="100000"/>
-              <a:buChar char="•"/>
-            </a:pPr>
-            <a:r>
-              <a:rPr lang="en-US" sz="1300" dirty="0">
-                <a:solidFill>
-                  <a:srgbClr val="3D3A36"/>
-                </a:solidFill>
-                <a:latin typeface="Calibri" pitchFamily="34" charset="0"/>
-                <a:ea typeface="Calibri" pitchFamily="34" charset="-122"/>
-                <a:cs typeface="Calibri" pitchFamily="34" charset="-120"/>
-              </a:rPr>
-              <a:t>Magnetism</a:t>
-            </a:r>
-            <a:endParaRPr lang="en-US" sz="1300" dirty="0"/>
-          </a:p>
-          <a:p>
-            <a:pPr marL="342900" indent="-342900">
-              <a:lnSpc>
-                <a:spcPct val="135000"/>
-              </a:lnSpc>
-              <a:buSzPct val="100000"/>
-              <a:buChar char="•"/>
-            </a:pPr>
-            <a:r>
-              <a:rPr lang="en-US" sz="1300" dirty="0">
-                <a:solidFill>
-                  <a:srgbClr val="3D3A36"/>
-                </a:solidFill>
-                <a:latin typeface="Calibri" pitchFamily="34" charset="0"/>
-                <a:ea typeface="Calibri" pitchFamily="34" charset="-122"/>
-                <a:cs typeface="Calibri" pitchFamily="34" charset="-120"/>
-              </a:rPr>
-              <a:t>Electrostatic force</a:t>
-            </a:r>
-            <a:endParaRPr lang="en-US" sz="1300" dirty="0"/>
-          </a:p>
-          <a:p>
-            <a:pPr marL="342900" indent="-342900">
-              <a:lnSpc>
-                <a:spcPct val="135000"/>
-              </a:lnSpc>
-              <a:buSzPct val="100000"/>
-              <a:buChar char="•"/>
-            </a:pPr>
-            <a:r>
-              <a:rPr lang="en-US" sz="1300" dirty="0">
-                <a:solidFill>
-                  <a:srgbClr val="3D3A36"/>
-                </a:solidFill>
-                <a:latin typeface="Calibri" pitchFamily="34" charset="0"/>
-                <a:ea typeface="Calibri" pitchFamily="34" charset="-122"/>
-                <a:cs typeface="Calibri" pitchFamily="34" charset="-120"/>
-              </a:rPr>
-              <a:t>No touching needed</a:t>
+              <a:t>Named after Sir Isaac Newton (1643–1727).</a:t>
             </a:r>
             <a:endParaRPr lang="en-US" sz="1300" dirty="0"/>
           </a:p>
@@ -2224,6 +2348,13 @@
 <file path=ppt/slides/slide4.xml><?xml version="1.0" encoding="utf-8"?>
 <p:sld xmlns:a="http://schemas.openxmlformats.org/drawingml/2006/main" xmlns:r="http://schemas.openxmlformats.org/officeDocument/2006/relationships" xmlns:p="http://schemas.openxmlformats.org/presentationml/2006/main">
   <p:cSld name="Slide 4">
+    <p:bg>
+      <p:bgPr>
+        <a:solidFill>
+          <a:srgbClr val="FAF8F5"/>
+        </a:solidFill>
+      </p:bgPr>
+    </p:bg>
     <p:spTree>
       <p:nvGrpSpPr>
         <p:cNvPr id="1" name=""/>
@@ -2247,13 +2378,13 @@
         <p:spPr>
           <a:xfrm>
             <a:off x="0" y="0"/>
-            <a:ext cx="9144000" cy="5143500"/>
+            <a:ext cx="9144000" cy="822960"/>
           </a:xfrm>
           <a:prstGeom prst="rect">
             <a:avLst/>
           </a:prstGeom>
           <a:solidFill>
-            <a:srgbClr val="FAF8F5"/>
+            <a:srgbClr val="FFFFFF"/>
           </a:solidFill>
           <a:ln/>
         </p:spPr>
@@ -2266,8 +2397,8 @@
         </p:nvSpPr>
         <p:spPr>
           <a:xfrm>
-            <a:off x="0" y="0"/>
-            <a:ext cx="9144000" cy="54864"/>
+            <a:off x="0" y="795528"/>
+            <a:ext cx="9144000" cy="27432"/>
           </a:xfrm>
           <a:prstGeom prst="rect">
             <a:avLst/>
@@ -2286,7 +2417,7 @@
         </p:nvSpPr>
         <p:spPr>
           <a:xfrm>
-            <a:off x="640080" y="320040"/>
+            <a:off x="640080" y="91440"/>
             <a:ext cx="7863840" cy="640080"/>
           </a:xfrm>
           <a:prstGeom prst="rect">
@@ -2303,7 +2434,7 @@
               <a:buNone/>
             </a:pPr>
             <a:r>
-              <a:rPr lang="en-US" sz="2600" b="1" dirty="0">
+              <a:rPr lang="en-US" sz="2200" b="1" dirty="0">
                 <a:solidFill>
                   <a:srgbClr val="1B2A4A"/>
                 </a:solidFill>
@@ -2311,286 +2442,15 @@
                 <a:ea typeface="Georgia" pitchFamily="34" charset="-122"/>
                 <a:cs typeface="Georgia" pitchFamily="34" charset="-120"/>
               </a:rPr>
-              <a:t>Weight vs Mass</a:t>
-            </a:r>
-            <a:endParaRPr lang="en-US" sz="2600" dirty="0"/>
-          </a:p>
-        </p:txBody>
-      </p:sp>
-      <p:sp>
-        <p:nvSpPr>
-          <p:cNvPr id="5" name="Text 3"/>
-          <p:cNvSpPr/>
-          <p:nvPr/>
-        </p:nvSpPr>
-        <p:spPr>
-          <a:xfrm>
-            <a:off x="640080" y="1188720"/>
-            <a:ext cx="7863840" cy="3200400"/>
-          </a:xfrm>
-          <a:prstGeom prst="rect">
-            <a:avLst/>
-          </a:prstGeom>
-          <a:noFill/>
-          <a:ln/>
-        </p:spPr>
-        <p:txBody>
-          <a:bodyPr wrap="square" rtlCol="0" anchor="t"/>
-          <a:lstStyle/>
-          <a:p>
-            <a:pPr marL="342900" indent="-342900">
-              <a:lnSpc>
-                <a:spcPct val="140000"/>
-              </a:lnSpc>
-              <a:buSzPct val="100000"/>
-              <a:buChar char="•"/>
-            </a:pPr>
-            <a:r>
-              <a:rPr lang="en-US" sz="1500" dirty="0">
-                <a:solidFill>
-                  <a:srgbClr val="3D3A36"/>
-                </a:solidFill>
-                <a:latin typeface="Calibri" pitchFamily="34" charset="0"/>
-                <a:ea typeface="Calibri" pitchFamily="34" charset="-122"/>
-                <a:cs typeface="Calibri" pitchFamily="34" charset="-120"/>
-              </a:rPr>
-              <a:t>Mass = amount of matter in an object (kg). Does not change.</a:t>
-            </a:r>
-            <a:endParaRPr lang="en-US" sz="1500" dirty="0"/>
-          </a:p>
-          <a:p>
-            <a:pPr marL="342900" indent="-342900">
-              <a:lnSpc>
-                <a:spcPct val="140000"/>
-              </a:lnSpc>
-              <a:buSzPct val="100000"/>
-              <a:buChar char="•"/>
-            </a:pPr>
-            <a:r>
-              <a:rPr lang="en-US" sz="1500" dirty="0">
-                <a:solidFill>
-                  <a:srgbClr val="3D3A36"/>
-                </a:solidFill>
-                <a:latin typeface="Calibri" pitchFamily="34" charset="0"/>
-                <a:ea typeface="Calibri" pitchFamily="34" charset="-122"/>
-                <a:cs typeface="Calibri" pitchFamily="34" charset="-120"/>
-              </a:rPr>
-              <a:t>Weight = force of gravity on an object (N). Changes with location.</a:t>
-            </a:r>
-            <a:endParaRPr lang="en-US" sz="1500" dirty="0"/>
-          </a:p>
-          <a:p>
-            <a:pPr marL="342900" indent="-342900">
-              <a:lnSpc>
-                <a:spcPct val="140000"/>
-              </a:lnSpc>
-              <a:buSzPct val="100000"/>
-              <a:buChar char="•"/>
-            </a:pPr>
-            <a:r>
-              <a:rPr lang="en-US" sz="1500" dirty="0">
-                <a:solidFill>
-                  <a:srgbClr val="3D3A36"/>
-                </a:solidFill>
-                <a:latin typeface="Calibri" pitchFamily="34" charset="0"/>
-                <a:ea typeface="Calibri" pitchFamily="34" charset="-122"/>
-                <a:cs typeface="Calibri" pitchFamily="34" charset="-120"/>
-              </a:rPr>
-              <a:t>Formula: Weight = mass × g</a:t>
-            </a:r>
-            <a:endParaRPr lang="en-US" sz="1500" dirty="0"/>
-          </a:p>
-          <a:p>
-            <a:pPr marL="342900" indent="-342900">
-              <a:lnSpc>
-                <a:spcPct val="140000"/>
-              </a:lnSpc>
-              <a:buSzPct val="100000"/>
-              <a:buChar char="•"/>
-            </a:pPr>
-            <a:r>
-              <a:rPr lang="en-US" sz="1500" dirty="0">
-                <a:solidFill>
-                  <a:srgbClr val="3D3A36"/>
-                </a:solidFill>
-                <a:latin typeface="Calibri" pitchFamily="34" charset="0"/>
-                <a:ea typeface="Calibri" pitchFamily="34" charset="-122"/>
-                <a:cs typeface="Calibri" pitchFamily="34" charset="-120"/>
-              </a:rPr>
-              <a:t>On Earth: g = 10 N/kg, so a 7 kg object weighs 70 N.</a:t>
-            </a:r>
-            <a:endParaRPr lang="en-US" sz="1500" dirty="0"/>
-          </a:p>
-        </p:txBody>
-      </p:sp>
-      <p:sp>
-        <p:nvSpPr>
-          <p:cNvPr id="6" name="Shape 4"/>
-          <p:cNvSpPr/>
-          <p:nvPr/>
-        </p:nvSpPr>
-        <p:spPr>
-          <a:xfrm>
-            <a:off x="640080" y="4206240"/>
-            <a:ext cx="7863840" cy="640080"/>
-          </a:xfrm>
-          <a:prstGeom prst="roundRect">
-            <a:avLst>
-              <a:gd name="adj" fmla="val 11429"/>
-            </a:avLst>
-          </a:prstGeom>
-          <a:solidFill>
-            <a:srgbClr val="E8F5F3"/>
-          </a:solidFill>
-          <a:ln/>
-        </p:spPr>
-      </p:sp>
-      <p:sp>
-        <p:nvSpPr>
-          <p:cNvPr id="7" name="Text 5"/>
-          <p:cNvSpPr/>
-          <p:nvPr/>
-        </p:nvSpPr>
-        <p:spPr>
-          <a:xfrm>
-            <a:off x="822960" y="4251960"/>
-            <a:ext cx="7498080" cy="548640"/>
-          </a:xfrm>
-          <a:prstGeom prst="rect">
-            <a:avLst/>
-          </a:prstGeom>
-          <a:noFill/>
-          <a:ln/>
-        </p:spPr>
-        <p:txBody>
-          <a:bodyPr wrap="square" rtlCol="0" anchor="ctr"/>
-          <a:lstStyle/>
-          <a:p>
-            <a:pPr indent="0" marL="0">
-              <a:buNone/>
-            </a:pPr>
-            <a:r>
-              <a:rPr lang="en-US" sz="1200" i="1" dirty="0">
-                <a:solidFill>
-                  <a:srgbClr val="2A9D8F"/>
-                </a:solidFill>
-                <a:latin typeface="Calibri" pitchFamily="34" charset="0"/>
-                <a:ea typeface="Calibri" pitchFamily="34" charset="-122"/>
-                <a:cs typeface="Calibri" pitchFamily="34" charset="-120"/>
-              </a:rPr>
-              <a:t>Your mass on the Moon is the same. Your weight is 6× less!</a:t>
-            </a:r>
-            <a:endParaRPr lang="en-US" sz="1200" dirty="0"/>
-          </a:p>
-        </p:txBody>
-      </p:sp>
-    </p:spTree>
-  </p:cSld>
-  <p:clrMapOvr>
-    <a:masterClrMapping/>
-  </p:clrMapOvr>
-</p:sld>
-</file>
-
-<file path=ppt/slides/slide5.xml><?xml version="1.0" encoding="utf-8"?>
-<p:sld xmlns:a="http://schemas.openxmlformats.org/drawingml/2006/main" xmlns:r="http://schemas.openxmlformats.org/officeDocument/2006/relationships" xmlns:p="http://schemas.openxmlformats.org/presentationml/2006/main">
-  <p:cSld name="Slide 5">
-    <p:spTree>
-      <p:nvGrpSpPr>
-        <p:cNvPr id="1" name=""/>
-        <p:cNvGrpSpPr/>
-        <p:nvPr/>
-      </p:nvGrpSpPr>
-      <p:grpSpPr>
-        <a:xfrm>
-          <a:off x="0" y="0"/>
-          <a:ext cx="0" cy="0"/>
-          <a:chOff x="0" y="0"/>
-          <a:chExt cx="0" cy="0"/>
-        </a:xfrm>
-      </p:grpSpPr>
-      <p:sp>
-        <p:nvSpPr>
-          <p:cNvPr id="2" name="Shape 0"/>
-          <p:cNvSpPr/>
-          <p:nvPr/>
-        </p:nvSpPr>
-        <p:spPr>
-          <a:xfrm>
-            <a:off x="0" y="0"/>
-            <a:ext cx="9144000" cy="5143500"/>
-          </a:xfrm>
-          <a:prstGeom prst="rect">
-            <a:avLst/>
-          </a:prstGeom>
-          <a:solidFill>
-            <a:srgbClr val="FAF8F5"/>
-          </a:solidFill>
-          <a:ln/>
-        </p:spPr>
-      </p:sp>
-      <p:sp>
-        <p:nvSpPr>
-          <p:cNvPr id="3" name="Shape 1"/>
-          <p:cNvSpPr/>
-          <p:nvPr/>
-        </p:nvSpPr>
-        <p:spPr>
-          <a:xfrm>
-            <a:off x="0" y="0"/>
-            <a:ext cx="9144000" cy="54864"/>
-          </a:xfrm>
-          <a:prstGeom prst="rect">
-            <a:avLst/>
-          </a:prstGeom>
-          <a:solidFill>
-            <a:srgbClr val="C8372D"/>
-          </a:solidFill>
-          <a:ln/>
-        </p:spPr>
-      </p:sp>
-      <p:sp>
-        <p:nvSpPr>
-          <p:cNvPr id="4" name="Text 2"/>
-          <p:cNvSpPr/>
-          <p:nvPr/>
-        </p:nvSpPr>
-        <p:spPr>
-          <a:xfrm>
-            <a:off x="640080" y="320040"/>
-            <a:ext cx="7863840" cy="548640"/>
-          </a:xfrm>
-          <a:prstGeom prst="rect">
-            <a:avLst/>
-          </a:prstGeom>
-          <a:noFill/>
-          <a:ln/>
-        </p:spPr>
-        <p:txBody>
-          <a:bodyPr wrap="square" lIns="0" tIns="0" rIns="0" bIns="0" rtlCol="0" anchor="ctr"/>
-          <a:lstStyle/>
-          <a:p>
-            <a:pPr indent="0" marL="0">
-              <a:buNone/>
-            </a:pPr>
-            <a:r>
-              <a:rPr lang="en-US" sz="2600" b="1" dirty="0">
-                <a:solidFill>
-                  <a:srgbClr val="1B2A4A"/>
-                </a:solidFill>
-                <a:latin typeface="Georgia" pitchFamily="34" charset="0"/>
-                <a:ea typeface="Georgia" pitchFamily="34" charset="-122"/>
-                <a:cs typeface="Georgia" pitchFamily="34" charset="-120"/>
-              </a:rPr>
-              <a:t>Key Terms</a:t>
-            </a:r>
-            <a:endParaRPr lang="en-US" sz="2600" dirty="0"/>
+              <a:t>Key Vocabulary</a:t>
+            </a:r>
+            <a:endParaRPr lang="en-US" sz="2200" dirty="0"/>
           </a:p>
         </p:txBody>
       </p:sp>
       <p:graphicFrame>
         <p:nvGraphicFramePr>
-          <p:cNvPr id="6" name="Table 0"/>
+          <p:cNvPr id="5" name="Table 0"/>
           <p:cNvGraphicFramePr>
             <a:graphicFrameLocks noGrp="1"/>
           </p:cNvGraphicFramePr>
@@ -2603,7 +2463,7 @@
           </p:nvPr>
         </p:nvGraphicFramePr>
         <p:xfrm>
-          <a:off x="640080" y="1051560"/>
+          <a:off x="640080" y="1005840"/>
           <a:ext cx="7863840" cy="914400"/>
         </p:xfrm>
         <a:graphic>
@@ -2611,10 +2471,10 @@
             <a:tbl>
               <a:tblPr/>
               <a:tblGrid>
-                <a:gridCol w="2560320"/>
-                <a:gridCol w="5303520"/>
+                <a:gridCol w="2286000"/>
+                <a:gridCol w="5577840"/>
               </a:tblGrid>
-              <a:tr h="594360">
+              <a:tr h="457200">
                 <a:tc>
                   <a:txBody>
                     <a:bodyPr/>
@@ -2752,7 +2612,7 @@
                   </a:tcPr>
                 </a:tc>
               </a:tr>
-              <a:tr h="594360">
+              <a:tr h="457200">
                 <a:tc>
                   <a:txBody>
                     <a:bodyPr/>
@@ -2762,7 +2622,7 @@
                         <a:buNone/>
                       </a:pPr>
                       <a:r>
-                        <a:rPr lang="en-US" sz="1300" b="1" dirty="0">
+                        <a:rPr lang="en-US" sz="1400" b="1" dirty="0">
                           <a:solidFill>
                             <a:srgbClr val="1B2A4A"/>
                           </a:solidFill>
@@ -2772,7 +2632,7 @@
                         </a:rPr>
                         <a:t>Force</a:t>
                       </a:r>
-                      <a:endParaRPr lang="en-US" sz="1300" dirty="0">
+                      <a:endParaRPr lang="en-US" sz="1400" dirty="0">
                         <a:latin typeface="Calibri" charset="0"/>
                         <a:ea typeface="Calibri" charset="0"/>
                         <a:cs typeface="Calibri" charset="0"/>
@@ -2827,7 +2687,7 @@
                         <a:buNone/>
                       </a:pPr>
                       <a:r>
-                        <a:rPr lang="en-US" sz="1300" dirty="0">
+                        <a:rPr lang="en-US" sz="1400" dirty="0">
                           <a:solidFill>
                             <a:srgbClr val="3D3A36"/>
                           </a:solidFill>
@@ -2835,9 +2695,9 @@
                           <a:ea typeface="Calibri" pitchFamily="34" charset="-122"/>
                           <a:cs typeface="Calibri" pitchFamily="34" charset="-120"/>
                         </a:rPr>
-                        <a:t>A push or pull, measured in Newtons (N)</a:t>
+                        <a:t>A push or pull. Measured in Newtons (N).</a:t>
                       </a:r>
-                      <a:endParaRPr lang="en-US" sz="1300" dirty="0">
+                      <a:endParaRPr lang="en-US" sz="1400" dirty="0">
                         <a:latin typeface="Calibri" charset="0"/>
                         <a:ea typeface="Calibri" charset="0"/>
                         <a:cs typeface="Calibri" charset="0"/>
@@ -2884,7 +2744,7 @@
                   </a:tcPr>
                 </a:tc>
               </a:tr>
-              <a:tr h="594360">
+              <a:tr h="457200">
                 <a:tc>
                   <a:txBody>
                     <a:bodyPr/>
@@ -2894,7 +2754,7 @@
                         <a:buNone/>
                       </a:pPr>
                       <a:r>
-                        <a:rPr lang="en-US" sz="1300" b="1" dirty="0">
+                        <a:rPr lang="en-US" sz="1400" b="1" dirty="0">
                           <a:solidFill>
                             <a:srgbClr val="1B2A4A"/>
                           </a:solidFill>
@@ -2904,7 +2764,7 @@
                         </a:rPr>
                         <a:t>Contact force</a:t>
                       </a:r>
-                      <a:endParaRPr lang="en-US" sz="1300" dirty="0">
+                      <a:endParaRPr lang="en-US" sz="1400" dirty="0">
                         <a:latin typeface="Calibri" charset="0"/>
                         <a:ea typeface="Calibri" charset="0"/>
                         <a:cs typeface="Calibri" charset="0"/>
@@ -2959,7 +2819,7 @@
                         <a:buNone/>
                       </a:pPr>
                       <a:r>
-                        <a:rPr lang="en-US" sz="1300" dirty="0">
+                        <a:rPr lang="en-US" sz="1400" dirty="0">
                           <a:solidFill>
                             <a:srgbClr val="3D3A36"/>
                           </a:solidFill>
@@ -2967,9 +2827,9 @@
                           <a:ea typeface="Calibri" pitchFamily="34" charset="-122"/>
                           <a:cs typeface="Calibri" pitchFamily="34" charset="-120"/>
                         </a:rPr>
-                        <a:t>Requires physical contact (e.g. friction)</a:t>
+                        <a:t>Requires touching (friction, tension, normal).</a:t>
                       </a:r>
-                      <a:endParaRPr lang="en-US" sz="1300" dirty="0">
+                      <a:endParaRPr lang="en-US" sz="1400" dirty="0">
                         <a:latin typeface="Calibri" charset="0"/>
                         <a:ea typeface="Calibri" charset="0"/>
                         <a:cs typeface="Calibri" charset="0"/>
@@ -3016,7 +2876,7 @@
                   </a:tcPr>
                 </a:tc>
               </a:tr>
-              <a:tr h="594360">
+              <a:tr h="457200">
                 <a:tc>
                   <a:txBody>
                     <a:bodyPr/>
@@ -3026,7 +2886,7 @@
                         <a:buNone/>
                       </a:pPr>
                       <a:r>
-                        <a:rPr lang="en-US" sz="1300" b="1" dirty="0">
+                        <a:rPr lang="en-US" sz="1400" b="1" dirty="0">
                           <a:solidFill>
                             <a:srgbClr val="1B2A4A"/>
                           </a:solidFill>
@@ -3036,7 +2896,7 @@
                         </a:rPr>
                         <a:t>Non-contact force</a:t>
                       </a:r>
-                      <a:endParaRPr lang="en-US" sz="1300" dirty="0">
+                      <a:endParaRPr lang="en-US" sz="1400" dirty="0">
                         <a:latin typeface="Calibri" charset="0"/>
                         <a:ea typeface="Calibri" charset="0"/>
                         <a:cs typeface="Calibri" charset="0"/>
@@ -3091,7 +2951,7 @@
                         <a:buNone/>
                       </a:pPr>
                       <a:r>
-                        <a:rPr lang="en-US" sz="1300" dirty="0">
+                        <a:rPr lang="en-US" sz="1400" dirty="0">
                           <a:solidFill>
                             <a:srgbClr val="3D3A36"/>
                           </a:solidFill>
@@ -3099,9 +2959,9 @@
                           <a:ea typeface="Calibri" pitchFamily="34" charset="-122"/>
                           <a:cs typeface="Calibri" pitchFamily="34" charset="-120"/>
                         </a:rPr>
-                        <a:t>Acts at a distance (e.g. gravity)</a:t>
+                        <a:t>Acts at distance (gravity, magnetism, electrostatic).</a:t>
                       </a:r>
-                      <a:endParaRPr lang="en-US" sz="1300" dirty="0">
+                      <a:endParaRPr lang="en-US" sz="1400" dirty="0">
                         <a:latin typeface="Calibri" charset="0"/>
                         <a:ea typeface="Calibri" charset="0"/>
                         <a:cs typeface="Calibri" charset="0"/>
@@ -3148,7 +3008,7 @@
                   </a:tcPr>
                 </a:tc>
               </a:tr>
-              <a:tr h="594360">
+              <a:tr h="457200">
                 <a:tc>
                   <a:txBody>
                     <a:bodyPr/>
@@ -3158,7 +3018,7 @@
                         <a:buNone/>
                       </a:pPr>
                       <a:r>
-                        <a:rPr lang="en-US" sz="1300" b="1" dirty="0">
+                        <a:rPr lang="en-US" sz="1400" b="1" dirty="0">
                           <a:solidFill>
                             <a:srgbClr val="1B2A4A"/>
                           </a:solidFill>
@@ -3166,9 +3026,9 @@
                           <a:ea typeface="Calibri" pitchFamily="34" charset="-122"/>
                           <a:cs typeface="Calibri" pitchFamily="34" charset="-120"/>
                         </a:rPr>
-                        <a:t>Weight</a:t>
+                        <a:t>Gravity</a:t>
                       </a:r>
-                      <a:endParaRPr lang="en-US" sz="1300" dirty="0">
+                      <a:endParaRPr lang="en-US" sz="1400" dirty="0">
                         <a:latin typeface="Calibri" charset="0"/>
                         <a:ea typeface="Calibri" charset="0"/>
                         <a:cs typeface="Calibri" charset="0"/>
@@ -3223,7 +3083,7 @@
                         <a:buNone/>
                       </a:pPr>
                       <a:r>
-                        <a:rPr lang="en-US" sz="1300" dirty="0">
+                        <a:rPr lang="en-US" sz="1400" dirty="0">
                           <a:solidFill>
                             <a:srgbClr val="3D3A36"/>
                           </a:solidFill>
@@ -3231,9 +3091,9 @@
                           <a:ea typeface="Calibri" pitchFamily="34" charset="-122"/>
                           <a:cs typeface="Calibri" pitchFamily="34" charset="-120"/>
                         </a:rPr>
-                        <a:t>Force of gravity; W = m × g</a:t>
+                        <a:t>Pulls objects toward each other.</a:t>
                       </a:r>
-                      <a:endParaRPr lang="en-US" sz="1300" dirty="0">
+                      <a:endParaRPr lang="en-US" sz="1400" dirty="0">
                         <a:latin typeface="Calibri" charset="0"/>
                         <a:ea typeface="Calibri" charset="0"/>
                         <a:cs typeface="Calibri" charset="0"/>
@@ -3280,7 +3140,7 @@
                   </a:tcPr>
                 </a:tc>
               </a:tr>
-              <a:tr h="594360">
+              <a:tr h="457200">
                 <a:tc>
                   <a:txBody>
                     <a:bodyPr/>
@@ -3290,7 +3150,7 @@
                         <a:buNone/>
                       </a:pPr>
                       <a:r>
-                        <a:rPr lang="en-US" sz="1300" b="1" dirty="0">
+                        <a:rPr lang="en-US" sz="1400" b="1" dirty="0">
                           <a:solidFill>
                             <a:srgbClr val="1B2A4A"/>
                           </a:solidFill>
@@ -3298,9 +3158,9 @@
                           <a:ea typeface="Calibri" pitchFamily="34" charset="-122"/>
                           <a:cs typeface="Calibri" pitchFamily="34" charset="-120"/>
                         </a:rPr>
-                        <a:t>Mass</a:t>
+                        <a:t>Friction</a:t>
                       </a:r>
-                      <a:endParaRPr lang="en-US" sz="1300" dirty="0">
+                      <a:endParaRPr lang="en-US" sz="1400" dirty="0">
                         <a:latin typeface="Calibri" charset="0"/>
                         <a:ea typeface="Calibri" charset="0"/>
                         <a:cs typeface="Calibri" charset="0"/>
@@ -3355,7 +3215,7 @@
                         <a:buNone/>
                       </a:pPr>
                       <a:r>
-                        <a:rPr lang="en-US" sz="1300" dirty="0">
+                        <a:rPr lang="en-US" sz="1400" dirty="0">
                           <a:solidFill>
                             <a:srgbClr val="3D3A36"/>
                           </a:solidFill>
@@ -3363,9 +3223,9 @@
                           <a:ea typeface="Calibri" pitchFamily="34" charset="-122"/>
                           <a:cs typeface="Calibri" pitchFamily="34" charset="-120"/>
                         </a:rPr>
-                        <a:t>Amount of matter; measured in kg</a:t>
+                        <a:t>Opposes motion between surfaces.</a:t>
                       </a:r>
-                      <a:endParaRPr lang="en-US" sz="1300" dirty="0">
+                      <a:endParaRPr lang="en-US" sz="1400" dirty="0">
                         <a:latin typeface="Calibri" charset="0"/>
                         <a:ea typeface="Calibri" charset="0"/>
                         <a:cs typeface="Calibri" charset="0"/>
@@ -3424,9 +3284,16 @@
 </p:sld>
 </file>
 
-<file path=ppt/slides/slide6.xml><?xml version="1.0" encoding="utf-8"?>
+<file path=ppt/slides/slide5.xml><?xml version="1.0" encoding="utf-8"?>
 <p:sld xmlns:a="http://schemas.openxmlformats.org/drawingml/2006/main" xmlns:r="http://schemas.openxmlformats.org/officeDocument/2006/relationships" xmlns:p="http://schemas.openxmlformats.org/presentationml/2006/main">
-  <p:cSld name="Slide 6">
+  <p:cSld name="Slide 5">
+    <p:bg>
+      <p:bgPr>
+        <a:solidFill>
+          <a:srgbClr val="FAF8F5"/>
+        </a:solidFill>
+      </p:bgPr>
+    </p:bg>
     <p:spTree>
       <p:nvGrpSpPr>
         <p:cNvPr id="1" name=""/>
@@ -3450,6 +3317,1439 @@
         <p:spPr>
           <a:xfrm>
             <a:off x="0" y="0"/>
+            <a:ext cx="9144000" cy="822960"/>
+          </a:xfrm>
+          <a:prstGeom prst="rect">
+            <a:avLst/>
+          </a:prstGeom>
+          <a:solidFill>
+            <a:srgbClr val="FFFFFF"/>
+          </a:solidFill>
+          <a:ln/>
+        </p:spPr>
+      </p:sp>
+      <p:sp>
+        <p:nvSpPr>
+          <p:cNvPr id="3" name="Shape 1"/>
+          <p:cNvSpPr/>
+          <p:nvPr/>
+        </p:nvSpPr>
+        <p:spPr>
+          <a:xfrm>
+            <a:off x="0" y="795528"/>
+            <a:ext cx="9144000" cy="27432"/>
+          </a:xfrm>
+          <a:prstGeom prst="rect">
+            <a:avLst/>
+          </a:prstGeom>
+          <a:solidFill>
+            <a:srgbClr val="C8372D"/>
+          </a:solidFill>
+          <a:ln/>
+        </p:spPr>
+      </p:sp>
+      <p:sp>
+        <p:nvSpPr>
+          <p:cNvPr id="4" name="Text 2"/>
+          <p:cNvSpPr/>
+          <p:nvPr/>
+        </p:nvSpPr>
+        <p:spPr>
+          <a:xfrm>
+            <a:off x="640080" y="91440"/>
+            <a:ext cx="7863840" cy="640080"/>
+          </a:xfrm>
+          <a:prstGeom prst="rect">
+            <a:avLst/>
+          </a:prstGeom>
+          <a:noFill/>
+          <a:ln/>
+        </p:spPr>
+        <p:txBody>
+          <a:bodyPr wrap="square" lIns="0" tIns="0" rIns="0" bIns="0" rtlCol="0" anchor="ctr"/>
+          <a:lstStyle/>
+          <a:p>
+            <a:pPr indent="0" marL="0">
+              <a:buNone/>
+            </a:pPr>
+            <a:r>
+              <a:rPr lang="en-US" sz="2200" b="1" dirty="0">
+                <a:solidFill>
+                  <a:srgbClr val="1B2A4A"/>
+                </a:solidFill>
+                <a:latin typeface="Georgia" pitchFamily="34" charset="0"/>
+                <a:ea typeface="Georgia" pitchFamily="34" charset="-122"/>
+                <a:cs typeface="Georgia" pitchFamily="34" charset="-120"/>
+              </a:rPr>
+              <a:t>Contact vs. Non-Contact</a:t>
+            </a:r>
+            <a:endParaRPr lang="en-US" sz="2200" dirty="0"/>
+          </a:p>
+        </p:txBody>
+      </p:sp>
+      <p:sp>
+        <p:nvSpPr>
+          <p:cNvPr id="5" name="Shape 3"/>
+          <p:cNvSpPr/>
+          <p:nvPr/>
+        </p:nvSpPr>
+        <p:spPr>
+          <a:xfrm>
+            <a:off x="457200" y="1005840"/>
+            <a:ext cx="3931920" cy="3657600"/>
+          </a:xfrm>
+          <a:prstGeom prst="rect">
+            <a:avLst/>
+          </a:prstGeom>
+          <a:solidFill>
+            <a:srgbClr val="FFFFFF"/>
+          </a:solidFill>
+          <a:ln/>
+          <a:effectLst>
+            <a:outerShdw sx="100000" sy="100000" kx="0" ky="0" algn="bl" rotWithShape="0" blurRad="76200" dist="25400" dir="8100000">
+              <a:srgbClr val="000000">
+                <a:alpha val="12000"/>
+              </a:srgbClr>
+            </a:outerShdw>
+          </a:effectLst>
+        </p:spPr>
+      </p:sp>
+      <p:sp>
+        <p:nvSpPr>
+          <p:cNvPr id="6" name="Shape 4"/>
+          <p:cNvSpPr/>
+          <p:nvPr/>
+        </p:nvSpPr>
+        <p:spPr>
+          <a:xfrm>
+            <a:off x="457200" y="1005840"/>
+            <a:ext cx="3931920" cy="64008"/>
+          </a:xfrm>
+          <a:prstGeom prst="rect">
+            <a:avLst/>
+          </a:prstGeom>
+          <a:solidFill>
+            <a:srgbClr val="C8372D"/>
+          </a:solidFill>
+          <a:ln/>
+        </p:spPr>
+      </p:sp>
+      <p:sp>
+        <p:nvSpPr>
+          <p:cNvPr id="7" name="Text 5"/>
+          <p:cNvSpPr/>
+          <p:nvPr/>
+        </p:nvSpPr>
+        <p:spPr>
+          <a:xfrm>
+            <a:off x="640080" y="1188720"/>
+            <a:ext cx="3566160" cy="457200"/>
+          </a:xfrm>
+          <a:prstGeom prst="rect">
+            <a:avLst/>
+          </a:prstGeom>
+          <a:noFill/>
+          <a:ln/>
+        </p:spPr>
+        <p:txBody>
+          <a:bodyPr wrap="square" rtlCol="0" anchor="ctr"/>
+          <a:lstStyle/>
+          <a:p>
+            <a:pPr indent="0" marL="0">
+              <a:buNone/>
+            </a:pPr>
+            <a:r>
+              <a:rPr lang="en-US" sz="1600" b="1" dirty="0">
+                <a:solidFill>
+                  <a:srgbClr val="C8372D"/>
+                </a:solidFill>
+                <a:latin typeface="Calibri" pitchFamily="34" charset="0"/>
+                <a:ea typeface="Calibri" pitchFamily="34" charset="-122"/>
+                <a:cs typeface="Calibri" pitchFamily="34" charset="-120"/>
+              </a:rPr>
+              <a:t>Contact Forces</a:t>
+            </a:r>
+            <a:endParaRPr lang="en-US" sz="1600" dirty="0"/>
+          </a:p>
+        </p:txBody>
+      </p:sp>
+      <p:sp>
+        <p:nvSpPr>
+          <p:cNvPr id="8" name="Text 6"/>
+          <p:cNvSpPr/>
+          <p:nvPr/>
+        </p:nvSpPr>
+        <p:spPr>
+          <a:xfrm>
+            <a:off x="640080" y="1691640"/>
+            <a:ext cx="3566160" cy="2743200"/>
+          </a:xfrm>
+          <a:prstGeom prst="rect">
+            <a:avLst/>
+          </a:prstGeom>
+          <a:noFill/>
+          <a:ln/>
+        </p:spPr>
+        <p:txBody>
+          <a:bodyPr wrap="square" rtlCol="0" anchor="ctr"/>
+          <a:lstStyle/>
+          <a:p>
+            <a:pPr marL="342900" indent="-342900">
+              <a:spcAft>
+                <a:spcPts val="600"/>
+              </a:spcAft>
+              <a:buSzPct val="100000"/>
+              <a:buChar char="•"/>
+            </a:pPr>
+            <a:r>
+              <a:rPr lang="en-US" sz="1400" dirty="0">
+                <a:solidFill>
+                  <a:srgbClr val="3D3A36"/>
+                </a:solidFill>
+                <a:latin typeface="Calibri" pitchFamily="34" charset="0"/>
+                <a:ea typeface="Calibri" pitchFamily="34" charset="-122"/>
+                <a:cs typeface="Calibri" pitchFamily="34" charset="-120"/>
+              </a:rPr>
+              <a:t>Friction — resists sliding.</a:t>
+            </a:r>
+            <a:endParaRPr lang="en-US" sz="1400" dirty="0"/>
+          </a:p>
+          <a:p>
+            <a:pPr marL="342900" indent="-342900">
+              <a:spcAft>
+                <a:spcPts val="600"/>
+              </a:spcAft>
+              <a:buSzPct val="100000"/>
+              <a:buChar char="•"/>
+            </a:pPr>
+            <a:r>
+              <a:rPr lang="en-US" sz="1400" dirty="0">
+                <a:solidFill>
+                  <a:srgbClr val="3D3A36"/>
+                </a:solidFill>
+                <a:latin typeface="Calibri" pitchFamily="34" charset="0"/>
+                <a:ea typeface="Calibri" pitchFamily="34" charset="-122"/>
+                <a:cs typeface="Calibri" pitchFamily="34" charset="-120"/>
+              </a:rPr>
+              <a:t>Air resistance — friction from air.</a:t>
+            </a:r>
+            <a:endParaRPr lang="en-US" sz="1400" dirty="0"/>
+          </a:p>
+          <a:p>
+            <a:pPr marL="342900" indent="-342900">
+              <a:spcAft>
+                <a:spcPts val="600"/>
+              </a:spcAft>
+              <a:buSzPct val="100000"/>
+              <a:buChar char="•"/>
+            </a:pPr>
+            <a:r>
+              <a:rPr lang="en-US" sz="1400" dirty="0">
+                <a:solidFill>
+                  <a:srgbClr val="3D3A36"/>
+                </a:solidFill>
+                <a:latin typeface="Calibri" pitchFamily="34" charset="0"/>
+                <a:ea typeface="Calibri" pitchFamily="34" charset="-122"/>
+                <a:cs typeface="Calibri" pitchFamily="34" charset="-120"/>
+              </a:rPr>
+              <a:t>Tension — pulling through rope.</a:t>
+            </a:r>
+            <a:endParaRPr lang="en-US" sz="1400" dirty="0"/>
+          </a:p>
+          <a:p>
+            <a:pPr marL="342900" indent="-342900">
+              <a:spcAft>
+                <a:spcPts val="600"/>
+              </a:spcAft>
+              <a:buSzPct val="100000"/>
+              <a:buChar char="•"/>
+            </a:pPr>
+            <a:r>
+              <a:rPr lang="en-US" sz="1400" dirty="0">
+                <a:solidFill>
+                  <a:srgbClr val="3D3A36"/>
+                </a:solidFill>
+                <a:latin typeface="Calibri" pitchFamily="34" charset="0"/>
+                <a:ea typeface="Calibri" pitchFamily="34" charset="-122"/>
+                <a:cs typeface="Calibri" pitchFamily="34" charset="-120"/>
+              </a:rPr>
+              <a:t>Normal force — surface pushes back.</a:t>
+            </a:r>
+            <a:endParaRPr lang="en-US" sz="1400" dirty="0"/>
+          </a:p>
+        </p:txBody>
+      </p:sp>
+      <p:sp>
+        <p:nvSpPr>
+          <p:cNvPr id="9" name="Shape 7"/>
+          <p:cNvSpPr/>
+          <p:nvPr/>
+        </p:nvSpPr>
+        <p:spPr>
+          <a:xfrm>
+            <a:off x="4754880" y="1005840"/>
+            <a:ext cx="3931920" cy="3657600"/>
+          </a:xfrm>
+          <a:prstGeom prst="rect">
+            <a:avLst/>
+          </a:prstGeom>
+          <a:solidFill>
+            <a:srgbClr val="FFFFFF"/>
+          </a:solidFill>
+          <a:ln/>
+          <a:effectLst>
+            <a:outerShdw sx="100000" sy="100000" kx="0" ky="0" algn="bl" rotWithShape="0" blurRad="76200" dist="25400" dir="8100000">
+              <a:srgbClr val="000000">
+                <a:alpha val="12000"/>
+              </a:srgbClr>
+            </a:outerShdw>
+          </a:effectLst>
+        </p:spPr>
+      </p:sp>
+      <p:sp>
+        <p:nvSpPr>
+          <p:cNvPr id="10" name="Shape 8"/>
+          <p:cNvSpPr/>
+          <p:nvPr/>
+        </p:nvSpPr>
+        <p:spPr>
+          <a:xfrm>
+            <a:off x="4754880" y="1005840"/>
+            <a:ext cx="3931920" cy="64008"/>
+          </a:xfrm>
+          <a:prstGeom prst="rect">
+            <a:avLst/>
+          </a:prstGeom>
+          <a:solidFill>
+            <a:srgbClr val="E9C46A"/>
+          </a:solidFill>
+          <a:ln/>
+        </p:spPr>
+      </p:sp>
+      <p:sp>
+        <p:nvSpPr>
+          <p:cNvPr id="11" name="Text 9"/>
+          <p:cNvSpPr/>
+          <p:nvPr/>
+        </p:nvSpPr>
+        <p:spPr>
+          <a:xfrm>
+            <a:off x="4937760" y="1188720"/>
+            <a:ext cx="3566160" cy="457200"/>
+          </a:xfrm>
+          <a:prstGeom prst="rect">
+            <a:avLst/>
+          </a:prstGeom>
+          <a:noFill/>
+          <a:ln/>
+        </p:spPr>
+        <p:txBody>
+          <a:bodyPr wrap="square" rtlCol="0" anchor="ctr"/>
+          <a:lstStyle/>
+          <a:p>
+            <a:pPr indent="0" marL="0">
+              <a:buNone/>
+            </a:pPr>
+            <a:r>
+              <a:rPr lang="en-US" sz="1600" b="1" dirty="0">
+                <a:solidFill>
+                  <a:srgbClr val="E9C46A"/>
+                </a:solidFill>
+                <a:latin typeface="Calibri" pitchFamily="34" charset="0"/>
+                <a:ea typeface="Calibri" pitchFamily="34" charset="-122"/>
+                <a:cs typeface="Calibri" pitchFamily="34" charset="-120"/>
+              </a:rPr>
+              <a:t>Non-Contact Forces</a:t>
+            </a:r>
+            <a:endParaRPr lang="en-US" sz="1600" dirty="0"/>
+          </a:p>
+        </p:txBody>
+      </p:sp>
+      <p:sp>
+        <p:nvSpPr>
+          <p:cNvPr id="12" name="Text 10"/>
+          <p:cNvSpPr/>
+          <p:nvPr/>
+        </p:nvSpPr>
+        <p:spPr>
+          <a:xfrm>
+            <a:off x="4937760" y="1691640"/>
+            <a:ext cx="3566160" cy="2743200"/>
+          </a:xfrm>
+          <a:prstGeom prst="rect">
+            <a:avLst/>
+          </a:prstGeom>
+          <a:noFill/>
+          <a:ln/>
+        </p:spPr>
+        <p:txBody>
+          <a:bodyPr wrap="square" rtlCol="0" anchor="ctr"/>
+          <a:lstStyle/>
+          <a:p>
+            <a:pPr marL="342900" indent="-342900">
+              <a:spcAft>
+                <a:spcPts val="600"/>
+              </a:spcAft>
+              <a:buSzPct val="100000"/>
+              <a:buChar char="•"/>
+            </a:pPr>
+            <a:r>
+              <a:rPr lang="en-US" sz="1400" dirty="0">
+                <a:solidFill>
+                  <a:srgbClr val="3D3A36"/>
+                </a:solidFill>
+                <a:latin typeface="Calibri" pitchFamily="34" charset="0"/>
+                <a:ea typeface="Calibri" pitchFamily="34" charset="-122"/>
+                <a:cs typeface="Calibri" pitchFamily="34" charset="-120"/>
+              </a:rPr>
+              <a:t>Gravity — pulls masses together.</a:t>
+            </a:r>
+            <a:endParaRPr lang="en-US" sz="1400" dirty="0"/>
+          </a:p>
+          <a:p>
+            <a:pPr marL="342900" indent="-342900">
+              <a:spcAft>
+                <a:spcPts val="600"/>
+              </a:spcAft>
+              <a:buSzPct val="100000"/>
+              <a:buChar char="•"/>
+            </a:pPr>
+            <a:r>
+              <a:rPr lang="en-US" sz="1400" dirty="0">
+                <a:solidFill>
+                  <a:srgbClr val="3D3A36"/>
+                </a:solidFill>
+                <a:latin typeface="Calibri" pitchFamily="34" charset="0"/>
+                <a:ea typeface="Calibri" pitchFamily="34" charset="-122"/>
+                <a:cs typeface="Calibri" pitchFamily="34" charset="-120"/>
+              </a:rPr>
+              <a:t>Magnetic — maglev trains (China), compass needles.</a:t>
+            </a:r>
+            <a:endParaRPr lang="en-US" sz="1400" dirty="0"/>
+          </a:p>
+          <a:p>
+            <a:pPr marL="342900" indent="-342900">
+              <a:spcAft>
+                <a:spcPts val="600"/>
+              </a:spcAft>
+              <a:buSzPct val="100000"/>
+              <a:buChar char="•"/>
+            </a:pPr>
+            <a:r>
+              <a:rPr lang="en-US" sz="1400" dirty="0">
+                <a:solidFill>
+                  <a:srgbClr val="3D3A36"/>
+                </a:solidFill>
+                <a:latin typeface="Calibri" pitchFamily="34" charset="0"/>
+                <a:ea typeface="Calibri" pitchFamily="34" charset="-122"/>
+                <a:cs typeface="Calibri" pitchFamily="34" charset="-120"/>
+              </a:rPr>
+              <a:t>Electrostatic — static cling in dry Korean/German winters.</a:t>
+            </a:r>
+            <a:endParaRPr lang="en-US" sz="1400" dirty="0"/>
+          </a:p>
+        </p:txBody>
+      </p:sp>
+    </p:spTree>
+  </p:cSld>
+  <p:clrMapOvr>
+    <a:masterClrMapping/>
+  </p:clrMapOvr>
+</p:sld>
+</file>
+
+<file path=ppt/slides/slide6.xml><?xml version="1.0" encoding="utf-8"?>
+<p:sld xmlns:a="http://schemas.openxmlformats.org/drawingml/2006/main" xmlns:r="http://schemas.openxmlformats.org/officeDocument/2006/relationships" xmlns:p="http://schemas.openxmlformats.org/presentationml/2006/main">
+  <p:cSld name="Slide 6">
+    <p:bg>
+      <p:bgPr>
+        <a:solidFill>
+          <a:srgbClr val="FAF8F5"/>
+        </a:solidFill>
+      </p:bgPr>
+    </p:bg>
+    <p:spTree>
+      <p:nvGrpSpPr>
+        <p:cNvPr id="1" name=""/>
+        <p:cNvGrpSpPr/>
+        <p:nvPr/>
+      </p:nvGrpSpPr>
+      <p:grpSpPr>
+        <a:xfrm>
+          <a:off x="0" y="0"/>
+          <a:ext cx="0" cy="0"/>
+          <a:chOff x="0" y="0"/>
+          <a:chExt cx="0" cy="0"/>
+        </a:xfrm>
+      </p:grpSpPr>
+      <p:sp>
+        <p:nvSpPr>
+          <p:cNvPr id="2" name="Shape 0"/>
+          <p:cNvSpPr/>
+          <p:nvPr/>
+        </p:nvSpPr>
+        <p:spPr>
+          <a:xfrm>
+            <a:off x="0" y="0"/>
+            <a:ext cx="9144000" cy="822960"/>
+          </a:xfrm>
+          <a:prstGeom prst="rect">
+            <a:avLst/>
+          </a:prstGeom>
+          <a:solidFill>
+            <a:srgbClr val="FFFFFF"/>
+          </a:solidFill>
+          <a:ln/>
+        </p:spPr>
+      </p:sp>
+      <p:sp>
+        <p:nvSpPr>
+          <p:cNvPr id="3" name="Shape 1"/>
+          <p:cNvSpPr/>
+          <p:nvPr/>
+        </p:nvSpPr>
+        <p:spPr>
+          <a:xfrm>
+            <a:off x="0" y="795528"/>
+            <a:ext cx="9144000" cy="27432"/>
+          </a:xfrm>
+          <a:prstGeom prst="rect">
+            <a:avLst/>
+          </a:prstGeom>
+          <a:solidFill>
+            <a:srgbClr val="C8372D"/>
+          </a:solidFill>
+          <a:ln/>
+        </p:spPr>
+      </p:sp>
+      <p:sp>
+        <p:nvSpPr>
+          <p:cNvPr id="4" name="Text 2"/>
+          <p:cNvSpPr/>
+          <p:nvPr/>
+        </p:nvSpPr>
+        <p:spPr>
+          <a:xfrm>
+            <a:off x="640080" y="91440"/>
+            <a:ext cx="7863840" cy="640080"/>
+          </a:xfrm>
+          <a:prstGeom prst="rect">
+            <a:avLst/>
+          </a:prstGeom>
+          <a:noFill/>
+          <a:ln/>
+        </p:spPr>
+        <p:txBody>
+          <a:bodyPr wrap="square" lIns="0" tIns="0" rIns="0" bIns="0" rtlCol="0" anchor="ctr"/>
+          <a:lstStyle/>
+          <a:p>
+            <a:pPr indent="0" marL="0">
+              <a:buNone/>
+            </a:pPr>
+            <a:r>
+              <a:rPr lang="en-US" sz="2200" b="1" dirty="0">
+                <a:solidFill>
+                  <a:srgbClr val="1B2A4A"/>
+                </a:solidFill>
+                <a:latin typeface="Georgia" pitchFamily="34" charset="0"/>
+                <a:ea typeface="Georgia" pitchFamily="34" charset="-122"/>
+                <a:cs typeface="Georgia" pitchFamily="34" charset="-120"/>
+              </a:rPr>
+              <a:t>Force Diagrams</a:t>
+            </a:r>
+            <a:endParaRPr lang="en-US" sz="2200" dirty="0"/>
+          </a:p>
+        </p:txBody>
+      </p:sp>
+      <p:sp>
+        <p:nvSpPr>
+          <p:cNvPr id="5" name="Text 3"/>
+          <p:cNvSpPr/>
+          <p:nvPr/>
+        </p:nvSpPr>
+        <p:spPr>
+          <a:xfrm>
+            <a:off x="640080" y="1005840"/>
+            <a:ext cx="7863840" cy="2926080"/>
+          </a:xfrm>
+          <a:prstGeom prst="rect">
+            <a:avLst/>
+          </a:prstGeom>
+          <a:noFill/>
+          <a:ln/>
+        </p:spPr>
+        <p:txBody>
+          <a:bodyPr wrap="square" rtlCol="0" anchor="ctr"/>
+          <a:lstStyle/>
+          <a:p>
+            <a:pPr marL="342900" indent="-342900">
+              <a:spcAft>
+                <a:spcPts val="800"/>
+              </a:spcAft>
+              <a:buSzPct val="100000"/>
+              <a:buChar char="•"/>
+            </a:pPr>
+            <a:r>
+              <a:rPr lang="en-US" sz="1600" dirty="0">
+                <a:solidFill>
+                  <a:srgbClr val="3D3A36"/>
+                </a:solidFill>
+                <a:latin typeface="Calibri" pitchFamily="34" charset="0"/>
+                <a:ea typeface="Calibri" pitchFamily="34" charset="-122"/>
+                <a:cs typeface="Calibri" pitchFamily="34" charset="-120"/>
+              </a:rPr>
+              <a:t>We draw forces as ARROWS on an object.</a:t>
+            </a:r>
+            <a:endParaRPr lang="en-US" sz="1600" dirty="0"/>
+          </a:p>
+          <a:p>
+            <a:pPr marL="342900" indent="-342900">
+              <a:spcAft>
+                <a:spcPts val="800"/>
+              </a:spcAft>
+              <a:buSzPct val="100000"/>
+              <a:buChar char="•"/>
+            </a:pPr>
+            <a:r>
+              <a:rPr lang="en-US" sz="1600" dirty="0">
+                <a:solidFill>
+                  <a:srgbClr val="3D3A36"/>
+                </a:solidFill>
+                <a:latin typeface="Calibri" pitchFamily="34" charset="0"/>
+                <a:ea typeface="Calibri" pitchFamily="34" charset="-122"/>
+                <a:cs typeface="Calibri" pitchFamily="34" charset="-120"/>
+              </a:rPr>
+              <a:t>Arrow length = size of force (longer = bigger).</a:t>
+            </a:r>
+            <a:endParaRPr lang="en-US" sz="1600" dirty="0"/>
+          </a:p>
+          <a:p>
+            <a:pPr marL="342900" indent="-342900">
+              <a:spcAft>
+                <a:spcPts val="800"/>
+              </a:spcAft>
+              <a:buSzPct val="100000"/>
+              <a:buChar char="•"/>
+            </a:pPr>
+            <a:r>
+              <a:rPr lang="en-US" sz="1600" dirty="0">
+                <a:solidFill>
+                  <a:srgbClr val="3D3A36"/>
+                </a:solidFill>
+                <a:latin typeface="Calibri" pitchFamily="34" charset="0"/>
+                <a:ea typeface="Calibri" pitchFamily="34" charset="-122"/>
+                <a:cs typeface="Calibri" pitchFamily="34" charset="-120"/>
+              </a:rPr>
+              <a:t>Arrow direction = direction the force acts.</a:t>
+            </a:r>
+            <a:endParaRPr lang="en-US" sz="1600" dirty="0"/>
+          </a:p>
+          <a:p>
+            <a:pPr marL="342900" indent="-342900">
+              <a:spcAft>
+                <a:spcPts val="800"/>
+              </a:spcAft>
+              <a:buSzPct val="100000"/>
+              <a:buChar char="•"/>
+            </a:pPr>
+            <a:r>
+              <a:rPr lang="en-US" sz="1600" dirty="0">
+                <a:solidFill>
+                  <a:srgbClr val="3D3A36"/>
+                </a:solidFill>
+                <a:latin typeface="Calibri" pitchFamily="34" charset="0"/>
+                <a:ea typeface="Calibri" pitchFamily="34" charset="-122"/>
+                <a:cs typeface="Calibri" pitchFamily="34" charset="-120"/>
+              </a:rPr>
+              <a:t>Always label each arrow with the force name.</a:t>
+            </a:r>
+            <a:endParaRPr lang="en-US" sz="1600" dirty="0"/>
+          </a:p>
+          <a:p>
+            <a:pPr marL="342900" indent="-342900">
+              <a:spcAft>
+                <a:spcPts val="800"/>
+              </a:spcAft>
+              <a:buSzPct val="100000"/>
+              <a:buChar char="•"/>
+            </a:pPr>
+            <a:r>
+              <a:rPr lang="en-US" sz="1600" dirty="0">
+                <a:solidFill>
+                  <a:srgbClr val="3D3A36"/>
+                </a:solidFill>
+                <a:latin typeface="Calibri" pitchFamily="34" charset="0"/>
+                <a:ea typeface="Calibri" pitchFamily="34" charset="-122"/>
+                <a:cs typeface="Calibri" pitchFamily="34" charset="-120"/>
+              </a:rPr>
+              <a:t>Draw from the centre of the object outward.</a:t>
+            </a:r>
+            <a:endParaRPr lang="en-US" sz="1600" dirty="0"/>
+          </a:p>
+        </p:txBody>
+      </p:sp>
+      <p:sp>
+        <p:nvSpPr>
+          <p:cNvPr id="6" name="Shape 4"/>
+          <p:cNvSpPr/>
+          <p:nvPr/>
+        </p:nvSpPr>
+        <p:spPr>
+          <a:xfrm>
+            <a:off x="640080" y="4114800"/>
+            <a:ext cx="7863840" cy="731520"/>
+          </a:xfrm>
+          <a:prstGeom prst="rect">
+            <a:avLst/>
+          </a:prstGeom>
+          <a:solidFill>
+            <a:srgbClr val="E8F5F3"/>
+          </a:solidFill>
+          <a:ln/>
+          <a:effectLst>
+            <a:outerShdw sx="100000" sy="100000" kx="0" ky="0" algn="bl" rotWithShape="0" blurRad="76200" dist="25400" dir="8100000">
+              <a:srgbClr val="000000">
+                <a:alpha val="12000"/>
+              </a:srgbClr>
+            </a:outerShdw>
+          </a:effectLst>
+        </p:spPr>
+      </p:sp>
+      <p:sp>
+        <p:nvSpPr>
+          <p:cNvPr id="7" name="Shape 5"/>
+          <p:cNvSpPr/>
+          <p:nvPr/>
+        </p:nvSpPr>
+        <p:spPr>
+          <a:xfrm>
+            <a:off x="640080" y="4114800"/>
+            <a:ext cx="64008" cy="731520"/>
+          </a:xfrm>
+          <a:prstGeom prst="rect">
+            <a:avLst/>
+          </a:prstGeom>
+          <a:solidFill>
+            <a:srgbClr val="C8372D"/>
+          </a:solidFill>
+          <a:ln/>
+        </p:spPr>
+      </p:sp>
+      <p:sp>
+        <p:nvSpPr>
+          <p:cNvPr id="8" name="Text 6"/>
+          <p:cNvSpPr/>
+          <p:nvPr/>
+        </p:nvSpPr>
+        <p:spPr>
+          <a:xfrm>
+            <a:off x="914400" y="4160520"/>
+            <a:ext cx="7406640" cy="640080"/>
+          </a:xfrm>
+          <a:prstGeom prst="rect">
+            <a:avLst/>
+          </a:prstGeom>
+          <a:noFill/>
+          <a:ln/>
+        </p:spPr>
+        <p:txBody>
+          <a:bodyPr wrap="square" rtlCol="0" anchor="ctr"/>
+          <a:lstStyle/>
+          <a:p>
+            <a:pPr indent="0" marL="0">
+              <a:buNone/>
+            </a:pPr>
+            <a:r>
+              <a:rPr lang="en-US" sz="1300" i="1" dirty="0">
+                <a:solidFill>
+                  <a:srgbClr val="3D3A36"/>
+                </a:solidFill>
+                <a:latin typeface="Calibri" pitchFamily="34" charset="0"/>
+                <a:ea typeface="Calibri" pitchFamily="34" charset="-122"/>
+                <a:cs typeface="Calibri" pitchFamily="34" charset="-120"/>
+              </a:rPr>
+              <a:t>A force diagram is also called a free-body diagram.</a:t>
+            </a:r>
+            <a:endParaRPr lang="en-US" sz="1300" dirty="0"/>
+          </a:p>
+        </p:txBody>
+      </p:sp>
+    </p:spTree>
+  </p:cSld>
+  <p:clrMapOvr>
+    <a:masterClrMapping/>
+  </p:clrMapOvr>
+</p:sld>
+</file>
+
+<file path=ppt/slides/slide7.xml><?xml version="1.0" encoding="utf-8"?>
+<p:sld xmlns:a="http://schemas.openxmlformats.org/drawingml/2006/main" xmlns:r="http://schemas.openxmlformats.org/officeDocument/2006/relationships" xmlns:p="http://schemas.openxmlformats.org/presentationml/2006/main">
+  <p:cSld name="Slide 7">
+    <p:bg>
+      <p:bgPr>
+        <a:solidFill>
+          <a:srgbClr val="FAF8F5"/>
+        </a:solidFill>
+      </p:bgPr>
+    </p:bg>
+    <p:spTree>
+      <p:nvGrpSpPr>
+        <p:cNvPr id="1" name=""/>
+        <p:cNvGrpSpPr/>
+        <p:nvPr/>
+      </p:nvGrpSpPr>
+      <p:grpSpPr>
+        <a:xfrm>
+          <a:off x="0" y="0"/>
+          <a:ext cx="0" cy="0"/>
+          <a:chOff x="0" y="0"/>
+          <a:chExt cx="0" cy="0"/>
+        </a:xfrm>
+      </p:grpSpPr>
+      <p:sp>
+        <p:nvSpPr>
+          <p:cNvPr id="2" name="Shape 0"/>
+          <p:cNvSpPr/>
+          <p:nvPr/>
+        </p:nvSpPr>
+        <p:spPr>
+          <a:xfrm>
+            <a:off x="0" y="0"/>
+            <a:ext cx="9144000" cy="822960"/>
+          </a:xfrm>
+          <a:prstGeom prst="rect">
+            <a:avLst/>
+          </a:prstGeom>
+          <a:solidFill>
+            <a:srgbClr val="FFFFFF"/>
+          </a:solidFill>
+          <a:ln/>
+        </p:spPr>
+      </p:sp>
+      <p:sp>
+        <p:nvSpPr>
+          <p:cNvPr id="3" name="Shape 1"/>
+          <p:cNvSpPr/>
+          <p:nvPr/>
+        </p:nvSpPr>
+        <p:spPr>
+          <a:xfrm>
+            <a:off x="0" y="795528"/>
+            <a:ext cx="9144000" cy="27432"/>
+          </a:xfrm>
+          <a:prstGeom prst="rect">
+            <a:avLst/>
+          </a:prstGeom>
+          <a:solidFill>
+            <a:srgbClr val="C8372D"/>
+          </a:solidFill>
+          <a:ln/>
+        </p:spPr>
+      </p:sp>
+      <p:sp>
+        <p:nvSpPr>
+          <p:cNvPr id="4" name="Text 2"/>
+          <p:cNvSpPr/>
+          <p:nvPr/>
+        </p:nvSpPr>
+        <p:spPr>
+          <a:xfrm>
+            <a:off x="640080" y="91440"/>
+            <a:ext cx="7863840" cy="640080"/>
+          </a:xfrm>
+          <a:prstGeom prst="rect">
+            <a:avLst/>
+          </a:prstGeom>
+          <a:noFill/>
+          <a:ln/>
+        </p:spPr>
+        <p:txBody>
+          <a:bodyPr wrap="square" lIns="0" tIns="0" rIns="0" bIns="0" rtlCol="0" anchor="ctr"/>
+          <a:lstStyle/>
+          <a:p>
+            <a:pPr indent="0" marL="0">
+              <a:buNone/>
+            </a:pPr>
+            <a:r>
+              <a:rPr lang="en-US" sz="2200" b="1" dirty="0">
+                <a:solidFill>
+                  <a:srgbClr val="1B2A4A"/>
+                </a:solidFill>
+                <a:latin typeface="Georgia" pitchFamily="34" charset="0"/>
+                <a:ea typeface="Georgia" pitchFamily="34" charset="-122"/>
+                <a:cs typeface="Georgia" pitchFamily="34" charset="-120"/>
+              </a:rPr>
+              <a:t>Recommended Videos</a:t>
+            </a:r>
+            <a:endParaRPr lang="en-US" sz="2200" dirty="0"/>
+          </a:p>
+        </p:txBody>
+      </p:sp>
+      <p:sp>
+        <p:nvSpPr>
+          <p:cNvPr id="5" name="Text 3"/>
+          <p:cNvSpPr/>
+          <p:nvPr/>
+        </p:nvSpPr>
+        <p:spPr>
+          <a:xfrm>
+            <a:off x="640080" y="868680"/>
+            <a:ext cx="7863840" cy="274320"/>
+          </a:xfrm>
+          <a:prstGeom prst="rect">
+            <a:avLst/>
+          </a:prstGeom>
+          <a:noFill/>
+          <a:ln/>
+        </p:spPr>
+        <p:txBody>
+          <a:bodyPr wrap="square" rtlCol="0" anchor="ctr"/>
+          <a:lstStyle/>
+          <a:p>
+            <a:pPr indent="0" marL="0">
+              <a:buNone/>
+            </a:pPr>
+            <a:r>
+              <a:rPr lang="en-US" sz="1200" i="1" dirty="0">
+                <a:solidFill>
+                  <a:srgbClr val="6B6660"/>
+                </a:solidFill>
+                <a:latin typeface="Calibri" pitchFamily="34" charset="0"/>
+                <a:ea typeface="Calibri" pitchFamily="34" charset="-122"/>
+                <a:cs typeface="Calibri" pitchFamily="34" charset="-120"/>
+              </a:rPr>
+              <a:t>Search these on YouTube to learn more.</a:t>
+            </a:r>
+            <a:endParaRPr lang="en-US" sz="1200" dirty="0"/>
+          </a:p>
+        </p:txBody>
+      </p:sp>
+      <p:sp>
+        <p:nvSpPr>
+          <p:cNvPr id="6" name="Shape 4"/>
+          <p:cNvSpPr/>
+          <p:nvPr/>
+        </p:nvSpPr>
+        <p:spPr>
+          <a:xfrm>
+            <a:off x="457200" y="1234440"/>
+            <a:ext cx="8229600" cy="1051560"/>
+          </a:xfrm>
+          <a:prstGeom prst="rect">
+            <a:avLst/>
+          </a:prstGeom>
+          <a:solidFill>
+            <a:srgbClr val="FFFFFF"/>
+          </a:solidFill>
+          <a:ln/>
+          <a:effectLst>
+            <a:outerShdw sx="100000" sy="100000" kx="0" ky="0" algn="bl" rotWithShape="0" blurRad="76200" dist="25400" dir="8100000">
+              <a:srgbClr val="000000">
+                <a:alpha val="12000"/>
+              </a:srgbClr>
+            </a:outerShdw>
+          </a:effectLst>
+        </p:spPr>
+      </p:sp>
+      <p:sp>
+        <p:nvSpPr>
+          <p:cNvPr id="7" name="Shape 5"/>
+          <p:cNvSpPr/>
+          <p:nvPr/>
+        </p:nvSpPr>
+        <p:spPr>
+          <a:xfrm>
+            <a:off x="457200" y="1234440"/>
+            <a:ext cx="64008" cy="1051560"/>
+          </a:xfrm>
+          <a:prstGeom prst="rect">
+            <a:avLst/>
+          </a:prstGeom>
+          <a:solidFill>
+            <a:srgbClr val="C8372D"/>
+          </a:solidFill>
+          <a:ln/>
+        </p:spPr>
+      </p:sp>
+      <p:sp>
+        <p:nvSpPr>
+          <p:cNvPr id="8" name="Text 6"/>
+          <p:cNvSpPr/>
+          <p:nvPr/>
+        </p:nvSpPr>
+        <p:spPr>
+          <a:xfrm>
+            <a:off x="640080" y="1325880"/>
+            <a:ext cx="457200" cy="457200"/>
+          </a:xfrm>
+          <a:prstGeom prst="rect">
+            <a:avLst/>
+          </a:prstGeom>
+          <a:noFill/>
+          <a:ln/>
+        </p:spPr>
+        <p:txBody>
+          <a:bodyPr wrap="square" rtlCol="0" anchor="ctr"/>
+          <a:lstStyle/>
+          <a:p>
+            <a:pPr algn="ctr" indent="0" marL="0">
+              <a:buNone/>
+            </a:pPr>
+            <a:r>
+              <a:rPr lang="en-US" sz="2000" dirty="0">
+                <a:solidFill>
+                  <a:srgbClr val="C8372D"/>
+                </a:solidFill>
+                <a:latin typeface="Calibri" pitchFamily="34" charset="0"/>
+                <a:ea typeface="Calibri" pitchFamily="34" charset="-122"/>
+                <a:cs typeface="Calibri" pitchFamily="34" charset="-120"/>
+              </a:rPr>
+              <a:t>▶</a:t>
+            </a:r>
+            <a:endParaRPr lang="en-US" sz="2000" dirty="0"/>
+          </a:p>
+        </p:txBody>
+      </p:sp>
+      <p:sp>
+        <p:nvSpPr>
+          <p:cNvPr id="9" name="Text 7"/>
+          <p:cNvSpPr/>
+          <p:nvPr/>
+        </p:nvSpPr>
+        <p:spPr>
+          <a:xfrm>
+            <a:off x="1188720" y="1307592"/>
+            <a:ext cx="7132320" cy="411480"/>
+          </a:xfrm>
+          <a:prstGeom prst="rect">
+            <a:avLst/>
+          </a:prstGeom>
+          <a:noFill/>
+          <a:ln/>
+        </p:spPr>
+        <p:txBody>
+          <a:bodyPr wrap="square" rtlCol="0" anchor="ctr"/>
+          <a:lstStyle/>
+          <a:p>
+            <a:pPr indent="0" marL="0">
+              <a:buNone/>
+            </a:pPr>
+            <a:r>
+              <a:rPr lang="en-US" sz="1400" b="1" dirty="0">
+                <a:solidFill>
+                  <a:srgbClr val="1B2A4A"/>
+                </a:solidFill>
+                <a:latin typeface="Calibri" pitchFamily="34" charset="0"/>
+                <a:ea typeface="Calibri" pitchFamily="34" charset="-122"/>
+                <a:cs typeface="Calibri" pitchFamily="34" charset="-120"/>
+              </a:rPr>
+              <a:t>Introduction to Forces — Contact and Non-Contact</a:t>
+            </a:r>
+            <a:endParaRPr lang="en-US" sz="1400" dirty="0"/>
+          </a:p>
+        </p:txBody>
+      </p:sp>
+      <p:sp>
+        <p:nvSpPr>
+          <p:cNvPr id="10" name="Text 8"/>
+          <p:cNvSpPr/>
+          <p:nvPr/>
+        </p:nvSpPr>
+        <p:spPr>
+          <a:xfrm>
+            <a:off x="1188720" y="1691640"/>
+            <a:ext cx="7132320" cy="320040"/>
+          </a:xfrm>
+          <a:prstGeom prst="rect">
+            <a:avLst/>
+          </a:prstGeom>
+          <a:noFill/>
+          <a:ln/>
+        </p:spPr>
+        <p:txBody>
+          <a:bodyPr wrap="square" rtlCol="0" anchor="ctr"/>
+          <a:lstStyle/>
+          <a:p>
+            <a:pPr indent="0" marL="0">
+              <a:buNone/>
+            </a:pPr>
+            <a:r>
+              <a:rPr lang="en-US" sz="1100" dirty="0">
+                <a:solidFill>
+                  <a:srgbClr val="6B6660"/>
+                </a:solidFill>
+                <a:latin typeface="Calibri" pitchFamily="34" charset="0"/>
+                <a:ea typeface="Calibri" pitchFamily="34" charset="-122"/>
+                <a:cs typeface="Calibri" pitchFamily="34" charset="-120"/>
+              </a:rPr>
+              <a:t>FuseSchool  •  4 min</a:t>
+            </a:r>
+            <a:endParaRPr lang="en-US" sz="1100" dirty="0"/>
+          </a:p>
+        </p:txBody>
+      </p:sp>
+      <p:sp>
+        <p:nvSpPr>
+          <p:cNvPr id="11" name="Shape 9"/>
+          <p:cNvSpPr/>
+          <p:nvPr/>
+        </p:nvSpPr>
+        <p:spPr>
+          <a:xfrm>
+            <a:off x="457200" y="2423160"/>
+            <a:ext cx="8229600" cy="1051560"/>
+          </a:xfrm>
+          <a:prstGeom prst="rect">
+            <a:avLst/>
+          </a:prstGeom>
+          <a:solidFill>
+            <a:srgbClr val="FFFFFF"/>
+          </a:solidFill>
+          <a:ln/>
+          <a:effectLst>
+            <a:outerShdw sx="100000" sy="100000" kx="0" ky="0" algn="bl" rotWithShape="0" blurRad="76200" dist="25400" dir="8100000">
+              <a:srgbClr val="000000">
+                <a:alpha val="12000"/>
+              </a:srgbClr>
+            </a:outerShdw>
+          </a:effectLst>
+        </p:spPr>
+      </p:sp>
+      <p:sp>
+        <p:nvSpPr>
+          <p:cNvPr id="12" name="Shape 10"/>
+          <p:cNvSpPr/>
+          <p:nvPr/>
+        </p:nvSpPr>
+        <p:spPr>
+          <a:xfrm>
+            <a:off x="457200" y="2423160"/>
+            <a:ext cx="64008" cy="1051560"/>
+          </a:xfrm>
+          <a:prstGeom prst="rect">
+            <a:avLst/>
+          </a:prstGeom>
+          <a:solidFill>
+            <a:srgbClr val="C8372D"/>
+          </a:solidFill>
+          <a:ln/>
+        </p:spPr>
+      </p:sp>
+      <p:sp>
+        <p:nvSpPr>
+          <p:cNvPr id="13" name="Text 11"/>
+          <p:cNvSpPr/>
+          <p:nvPr/>
+        </p:nvSpPr>
+        <p:spPr>
+          <a:xfrm>
+            <a:off x="640080" y="2514600"/>
+            <a:ext cx="457200" cy="457200"/>
+          </a:xfrm>
+          <a:prstGeom prst="rect">
+            <a:avLst/>
+          </a:prstGeom>
+          <a:noFill/>
+          <a:ln/>
+        </p:spPr>
+        <p:txBody>
+          <a:bodyPr wrap="square" rtlCol="0" anchor="ctr"/>
+          <a:lstStyle/>
+          <a:p>
+            <a:pPr algn="ctr" indent="0" marL="0">
+              <a:buNone/>
+            </a:pPr>
+            <a:r>
+              <a:rPr lang="en-US" sz="2000" dirty="0">
+                <a:solidFill>
+                  <a:srgbClr val="C8372D"/>
+                </a:solidFill>
+                <a:latin typeface="Calibri" pitchFamily="34" charset="0"/>
+                <a:ea typeface="Calibri" pitchFamily="34" charset="-122"/>
+                <a:cs typeface="Calibri" pitchFamily="34" charset="-120"/>
+              </a:rPr>
+              <a:t>▶</a:t>
+            </a:r>
+            <a:endParaRPr lang="en-US" sz="2000" dirty="0"/>
+          </a:p>
+        </p:txBody>
+      </p:sp>
+      <p:sp>
+        <p:nvSpPr>
+          <p:cNvPr id="14" name="Text 12"/>
+          <p:cNvSpPr/>
+          <p:nvPr/>
+        </p:nvSpPr>
+        <p:spPr>
+          <a:xfrm>
+            <a:off x="1188720" y="2496312"/>
+            <a:ext cx="7132320" cy="411480"/>
+          </a:xfrm>
+          <a:prstGeom prst="rect">
+            <a:avLst/>
+          </a:prstGeom>
+          <a:noFill/>
+          <a:ln/>
+        </p:spPr>
+        <p:txBody>
+          <a:bodyPr wrap="square" rtlCol="0" anchor="ctr"/>
+          <a:lstStyle/>
+          <a:p>
+            <a:pPr indent="0" marL="0">
+              <a:buNone/>
+            </a:pPr>
+            <a:r>
+              <a:rPr lang="en-US" sz="1400" b="1" dirty="0">
+                <a:solidFill>
+                  <a:srgbClr val="1B2A4A"/>
+                </a:solidFill>
+                <a:latin typeface="Calibri" pitchFamily="34" charset="0"/>
+                <a:ea typeface="Calibri" pitchFamily="34" charset="-122"/>
+                <a:cs typeface="Calibri" pitchFamily="34" charset="-120"/>
+              </a:rPr>
+              <a:t>Forces and Free Body Diagrams</a:t>
+            </a:r>
+            <a:endParaRPr lang="en-US" sz="1400" dirty="0"/>
+          </a:p>
+        </p:txBody>
+      </p:sp>
+      <p:sp>
+        <p:nvSpPr>
+          <p:cNvPr id="15" name="Text 13"/>
+          <p:cNvSpPr/>
+          <p:nvPr/>
+        </p:nvSpPr>
+        <p:spPr>
+          <a:xfrm>
+            <a:off x="1188720" y="2880360"/>
+            <a:ext cx="7132320" cy="320040"/>
+          </a:xfrm>
+          <a:prstGeom prst="rect">
+            <a:avLst/>
+          </a:prstGeom>
+          <a:noFill/>
+          <a:ln/>
+        </p:spPr>
+        <p:txBody>
+          <a:bodyPr wrap="square" rtlCol="0" anchor="ctr"/>
+          <a:lstStyle/>
+          <a:p>
+            <a:pPr indent="0" marL="0">
+              <a:buNone/>
+            </a:pPr>
+            <a:r>
+              <a:rPr lang="en-US" sz="1100" dirty="0">
+                <a:solidFill>
+                  <a:srgbClr val="6B6660"/>
+                </a:solidFill>
+                <a:latin typeface="Calibri" pitchFamily="34" charset="0"/>
+                <a:ea typeface="Calibri" pitchFamily="34" charset="-122"/>
+                <a:cs typeface="Calibri" pitchFamily="34" charset="-120"/>
+              </a:rPr>
+              <a:t>Cognito  •  5 min</a:t>
+            </a:r>
+            <a:endParaRPr lang="en-US" sz="1100" dirty="0"/>
+          </a:p>
+        </p:txBody>
+      </p:sp>
+      <p:sp>
+        <p:nvSpPr>
+          <p:cNvPr id="16" name="Shape 14"/>
+          <p:cNvSpPr/>
+          <p:nvPr/>
+        </p:nvSpPr>
+        <p:spPr>
+          <a:xfrm>
+            <a:off x="457200" y="3611880"/>
+            <a:ext cx="8229600" cy="1051560"/>
+          </a:xfrm>
+          <a:prstGeom prst="rect">
+            <a:avLst/>
+          </a:prstGeom>
+          <a:solidFill>
+            <a:srgbClr val="FFFFFF"/>
+          </a:solidFill>
+          <a:ln/>
+          <a:effectLst>
+            <a:outerShdw sx="100000" sy="100000" kx="0" ky="0" algn="bl" rotWithShape="0" blurRad="76200" dist="25400" dir="8100000">
+              <a:srgbClr val="000000">
+                <a:alpha val="12000"/>
+              </a:srgbClr>
+            </a:outerShdw>
+          </a:effectLst>
+        </p:spPr>
+      </p:sp>
+      <p:sp>
+        <p:nvSpPr>
+          <p:cNvPr id="17" name="Shape 15"/>
+          <p:cNvSpPr/>
+          <p:nvPr/>
+        </p:nvSpPr>
+        <p:spPr>
+          <a:xfrm>
+            <a:off x="457200" y="3611880"/>
+            <a:ext cx="64008" cy="1051560"/>
+          </a:xfrm>
+          <a:prstGeom prst="rect">
+            <a:avLst/>
+          </a:prstGeom>
+          <a:solidFill>
+            <a:srgbClr val="C8372D"/>
+          </a:solidFill>
+          <a:ln/>
+        </p:spPr>
+      </p:sp>
+      <p:sp>
+        <p:nvSpPr>
+          <p:cNvPr id="18" name="Text 16"/>
+          <p:cNvSpPr/>
+          <p:nvPr/>
+        </p:nvSpPr>
+        <p:spPr>
+          <a:xfrm>
+            <a:off x="640080" y="3703320"/>
+            <a:ext cx="457200" cy="457200"/>
+          </a:xfrm>
+          <a:prstGeom prst="rect">
+            <a:avLst/>
+          </a:prstGeom>
+          <a:noFill/>
+          <a:ln/>
+        </p:spPr>
+        <p:txBody>
+          <a:bodyPr wrap="square" rtlCol="0" anchor="ctr"/>
+          <a:lstStyle/>
+          <a:p>
+            <a:pPr algn="ctr" indent="0" marL="0">
+              <a:buNone/>
+            </a:pPr>
+            <a:r>
+              <a:rPr lang="en-US" sz="2000" dirty="0">
+                <a:solidFill>
+                  <a:srgbClr val="C8372D"/>
+                </a:solidFill>
+                <a:latin typeface="Calibri" pitchFamily="34" charset="0"/>
+                <a:ea typeface="Calibri" pitchFamily="34" charset="-122"/>
+                <a:cs typeface="Calibri" pitchFamily="34" charset="-120"/>
+              </a:rPr>
+              <a:t>▶</a:t>
+            </a:r>
+            <a:endParaRPr lang="en-US" sz="2000" dirty="0"/>
+          </a:p>
+        </p:txBody>
+      </p:sp>
+      <p:sp>
+        <p:nvSpPr>
+          <p:cNvPr id="19" name="Text 17"/>
+          <p:cNvSpPr/>
+          <p:nvPr/>
+        </p:nvSpPr>
+        <p:spPr>
+          <a:xfrm>
+            <a:off x="1188720" y="3685032"/>
+            <a:ext cx="7132320" cy="411480"/>
+          </a:xfrm>
+          <a:prstGeom prst="rect">
+            <a:avLst/>
+          </a:prstGeom>
+          <a:noFill/>
+          <a:ln/>
+        </p:spPr>
+        <p:txBody>
+          <a:bodyPr wrap="square" rtlCol="0" anchor="ctr"/>
+          <a:lstStyle/>
+          <a:p>
+            <a:pPr indent="0" marL="0">
+              <a:buNone/>
+            </a:pPr>
+            <a:r>
+              <a:rPr lang="en-US" sz="1400" b="1" dirty="0">
+                <a:solidFill>
+                  <a:srgbClr val="1B2A4A"/>
+                </a:solidFill>
+                <a:latin typeface="Calibri" pitchFamily="34" charset="0"/>
+                <a:ea typeface="Calibri" pitchFamily="34" charset="-122"/>
+                <a:cs typeface="Calibri" pitchFamily="34" charset="-120"/>
+              </a:rPr>
+              <a:t>Types of Forces</a:t>
+            </a:r>
+            <a:endParaRPr lang="en-US" sz="1400" dirty="0"/>
+          </a:p>
+        </p:txBody>
+      </p:sp>
+      <p:sp>
+        <p:nvSpPr>
+          <p:cNvPr id="20" name="Text 18"/>
+          <p:cNvSpPr/>
+          <p:nvPr/>
+        </p:nvSpPr>
+        <p:spPr>
+          <a:xfrm>
+            <a:off x="1188720" y="4069080"/>
+            <a:ext cx="7132320" cy="320040"/>
+          </a:xfrm>
+          <a:prstGeom prst="rect">
+            <a:avLst/>
+          </a:prstGeom>
+          <a:noFill/>
+          <a:ln/>
+        </p:spPr>
+        <p:txBody>
+          <a:bodyPr wrap="square" rtlCol="0" anchor="ctr"/>
+          <a:lstStyle/>
+          <a:p>
+            <a:pPr indent="0" marL="0">
+              <a:buNone/>
+            </a:pPr>
+            <a:r>
+              <a:rPr lang="en-US" sz="1100" dirty="0">
+                <a:solidFill>
+                  <a:srgbClr val="6B6660"/>
+                </a:solidFill>
+                <a:latin typeface="Calibri" pitchFamily="34" charset="0"/>
+                <a:ea typeface="Calibri" pitchFamily="34" charset="-122"/>
+                <a:cs typeface="Calibri" pitchFamily="34" charset="-120"/>
+              </a:rPr>
+              <a:t>It's AumSum Time  •  5 min</a:t>
+            </a:r>
+            <a:endParaRPr lang="en-US" sz="1100" dirty="0"/>
+          </a:p>
+        </p:txBody>
+      </p:sp>
+    </p:spTree>
+  </p:cSld>
+  <p:clrMapOvr>
+    <a:masterClrMapping/>
+  </p:clrMapOvr>
+</p:sld>
+</file>
+
+<file path=ppt/slides/slide8.xml><?xml version="1.0" encoding="utf-8"?>
+<p:sld xmlns:a="http://schemas.openxmlformats.org/drawingml/2006/main" xmlns:r="http://schemas.openxmlformats.org/officeDocument/2006/relationships" xmlns:p="http://schemas.openxmlformats.org/presentationml/2006/main">
+  <p:cSld name="Slide 8">
+    <p:spTree>
+      <p:nvGrpSpPr>
+        <p:cNvPr id="1" name=""/>
+        <p:cNvGrpSpPr/>
+        <p:nvPr/>
+      </p:nvGrpSpPr>
+      <p:grpSpPr>
+        <a:xfrm>
+          <a:off x="0" y="0"/>
+          <a:ext cx="0" cy="0"/>
+          <a:chOff x="0" y="0"/>
+          <a:chExt cx="0" cy="0"/>
+        </a:xfrm>
+      </p:grpSpPr>
+      <p:sp>
+        <p:nvSpPr>
+          <p:cNvPr id="2" name="Shape 0"/>
+          <p:cNvSpPr/>
+          <p:nvPr/>
+        </p:nvSpPr>
+        <p:spPr>
+          <a:xfrm>
+            <a:off x="0" y="0"/>
             <a:ext cx="9144000" cy="5143500"/>
           </a:xfrm>
           <a:prstGeom prst="rect">
@@ -3528,7 +4828,7 @@
         </p:nvSpPr>
         <p:spPr>
           <a:xfrm>
-            <a:off x="731520" y="2468880"/>
+            <a:off x="731520" y="2560320"/>
             <a:ext cx="7680960" cy="548640"/>
           </a:xfrm>
           <a:prstGeom prst="rect">
@@ -3545,7 +4845,7 @@
               <a:buNone/>
             </a:pPr>
             <a:r>
-              <a:rPr lang="en-US" sz="1800" dirty="0">
+              <a:rPr lang="en-US" sz="2000" dirty="0">
                 <a:solidFill>
                   <a:srgbClr val="C8372D"/>
                 </a:solidFill>
@@ -3553,48 +4853,9 @@
                 <a:ea typeface="Calibri" pitchFamily="34" charset="-122"/>
                 <a:cs typeface="Calibri" pitchFamily="34" charset="-120"/>
               </a:rPr>
-              <a:t>learnlattice.org/students/exam-revision</a:t>
-            </a:r>
-            <a:endParaRPr lang="en-US" sz="1800" dirty="0"/>
-          </a:p>
-        </p:txBody>
-      </p:sp>
-      <p:sp>
-        <p:nvSpPr>
-          <p:cNvPr id="6" name="Text 4"/>
-          <p:cNvSpPr/>
-          <p:nvPr/>
-        </p:nvSpPr>
-        <p:spPr>
-          <a:xfrm>
-            <a:off x="731520" y="3200400"/>
-            <a:ext cx="7680960" cy="457200"/>
-          </a:xfrm>
-          <a:prstGeom prst="rect">
-            <a:avLst/>
-          </a:prstGeom>
-          <a:noFill/>
-          <a:ln/>
-        </p:spPr>
-        <p:txBody>
-          <a:bodyPr wrap="square" rtlCol="0" anchor="ctr"/>
-          <a:lstStyle/>
-          <a:p>
-            <a:pPr algn="ctr" indent="0" marL="0">
-              <a:buNone/>
-            </a:pPr>
-            <a:r>
-              <a:rPr lang="en-US" sz="1400" dirty="0">
-                <a:solidFill>
-                  <a:srgbClr val="9B9690"/>
-                </a:solidFill>
-                <a:latin typeface="Calibri" pitchFamily="34" charset="0"/>
-                <a:ea typeface="Calibri" pitchFamily="34" charset="-122"/>
-                <a:cs typeface="Calibri" pitchFamily="34" charset="-120"/>
-              </a:rPr>
               <a:t>mrzocchi.com</a:t>
             </a:r>
-            <a:endParaRPr lang="en-US" sz="1400" dirty="0"/>
+            <a:endParaRPr lang="en-US" sz="2000" dirty="0"/>
           </a:p>
         </p:txBody>
       </p:sp>
